--- a/Unterrichtsmaterial_Oberschule_Sachsen/Klasse_8/03_Robot_Karol/05_Praesentationen/05_Karol_Projekt.pptx
+++ b/Unterrichtsmaterial_Oberschule_Sachsen/Klasse_8/03_Robot_Karol/05_Praesentationen/05_Karol_Projekt.pptx
@@ -13,8 +13,6 @@
     <p:sldId id="261" r:id="rId13"/>
     <p:sldId id="262" r:id="rId14"/>
     <p:sldId id="263" r:id="rId15"/>
-    <p:sldId id="264" r:id="rId16"/>
-    <p:sldId id="265" r:id="rId17"/>
   </p:sldIdLst>
   <p:sldSz cx="12191695" cy="6858000" type="screen4x3"/>
   <p:notesSz cx="6858000" cy="9144000"/>
@@ -511,77 +509,7 @@
           <a:lstStyle/>
           <a:p>
             <a:r>
-              <a:t>Quellen: https://www.schule.bayern.de/karol · https://www.schulportal.sachsen.de/lplandb/lehrplan/514</a:t>
-            </a:r>
-          </a:p>
-        </p:txBody>
-      </p:sp>
-      <p:sp>
-        <p:nvSpPr>
-          <p:cNvPr id="4" name="Slide Number Placeholder 3"/>
-          <p:cNvSpPr>
-            <a:spLocks noGrp="1"/>
-          </p:cNvSpPr>
-          <p:nvPr>
-            <p:ph type="sldNum" idx="5" sz="quarter"/>
-          </p:nvPr>
-        </p:nvSpPr>
-        <p:spPr/>
-      </p:sp>
-    </p:spTree>
-  </p:cSld>
-  <p:clrMapOvr>
-    <a:masterClrMapping/>
-  </p:clrMapOvr>
-</p:notes>
-</file>
-
-<file path=ppt/notesSlides/notesSlide10.xml><?xml version="1.0" encoding="utf-8"?>
-<p:notes xmlns:a="http://schemas.openxmlformats.org/drawingml/2006/main" xmlns:p="http://schemas.openxmlformats.org/presentationml/2006/main" xmlns:r="http://schemas.openxmlformats.org/officeDocument/2006/relationships">
-  <p:cSld>
-    <p:spTree>
-      <p:nvGrpSpPr>
-        <p:cNvPr id="1" name=""/>
-        <p:cNvGrpSpPr/>
-        <p:nvPr/>
-      </p:nvGrpSpPr>
-      <p:grpSpPr>
-        <a:xfrm>
-          <a:off x="0" y="0"/>
-          <a:ext cx="0" cy="0"/>
-          <a:chOff x="0" y="0"/>
-          <a:chExt cx="0" cy="0"/>
-        </a:xfrm>
-      </p:grpSpPr>
-      <p:sp>
-        <p:nvSpPr>
-          <p:cNvPr id="2" name="Slide Image Placeholder 1"/>
-          <p:cNvSpPr>
-            <a:spLocks noGrp="1"/>
-          </p:cNvSpPr>
-          <p:nvPr>
-            <p:ph type="sldImg" idx="2"/>
-          </p:nvPr>
-        </p:nvSpPr>
-        <p:spPr/>
-      </p:sp>
-      <p:sp>
-        <p:nvSpPr>
-          <p:cNvPr id="3" name="Notes Placeholder 2"/>
-          <p:cNvSpPr>
-            <a:spLocks noGrp="1"/>
-          </p:cNvSpPr>
-          <p:nvPr>
-            <p:ph type="body" idx="3" sz="quarter"/>
-          </p:nvPr>
-        </p:nvSpPr>
-        <p:spPr/>
-        <p:txBody>
-          <a:bodyPr/>
-          <a:lstStyle/>
-          <a:p>
-            <a:r>
-              <a:t>Quellenfolie. Keine internen Repository-, Branch- oder Markdown-Verweise in der Schülerpräsentation.</a:t>
+              <a:t>Robot Karol: https://www.schule.bayern.de/karol · Lehrplan: https://www.schulportal.sachsen.de/lplandb/lehrplan/514</a:t>
             </a:r>
           </a:p>
         </p:txBody>
@@ -651,7 +579,7 @@
           <a:lstStyle/>
           <a:p>
             <a:r>
-              <a:t>Die Aufgabe ist direkt in der Präsentation enthalten; keine externe Datei muss gesucht werden. Startwelt: ausreichend große leere Welt, Karol an einer geeigneten Ecke. Die konkrete Startlage vor Beginn gemeinsam festlegen.</a:t>
+              <a:t>Aufgabe direkt in Präsentation; keine externe Welt suchen. Startlage gemeinsam festlegen.</a:t>
             </a:r>
           </a:p>
         </p:txBody>
@@ -721,7 +649,7 @@
           <a:lstStyle/>
           <a:p>
             <a:r>
-              <a:t>Nicht nur Ergebnis bewerten, sondern Struktur des Programms. Alternative korrekte Lösungen zulassen.</a:t>
+              <a:t>Nicht nur Ergebnis bewerten.</a:t>
             </a:r>
           </a:p>
         </p:txBody>
@@ -791,7 +719,7 @@
           <a:lstStyle/>
           <a:p>
             <a:r>
-              <a:t>Planungsphase vor dem Programmieren. Noch keinen vollständigen Lösungscode zeigen.</a:t>
+              <a:t>Planungsfolie vor dem Programmieren.</a:t>
             </a:r>
           </a:p>
         </p:txBody>
@@ -861,7 +789,7 @@
           <a:lstStyle/>
           <a:p>
             <a:r>
-              <a:t>Code-Check während der Arbeitsphase. Lehrkraft fragt gezielt nach Definition und Aufruf.</a:t>
+              <a:t>Checkliste während der Arbeitsphase.</a:t>
             </a:r>
           </a:p>
         </p:txBody>
@@ -931,7 +859,7 @@
           <a:lstStyle/>
           <a:p>
             <a:r>
-              <a:t>Testfälle an das konkrete Projekt binden. Erwartung vor dem Ausführen formulieren.</a:t>
+              <a:t>Lösungscode nur in Lehrerhinweisen. Schüler sehen Ergebnis und Struktogramm.</a:t>
             </a:r>
           </a:p>
         </p:txBody>
@@ -1001,106 +929,7 @@
           <a:lstStyle/>
           <a:p>
             <a:r>
-              <a:t>MÖGLICHE MUSTERLÖSUNG – vor Einsatz mit der verwendeten Robot-Karol-Version prüfen/kopieren:</a:t>
-            </a:r>
-          </a:p>
-          <a:p/>
-          <a:p>
-            <a:r>
-              <a:t>Anweisung ReiheBauen</a:t>
-            </a:r>
-          </a:p>
-          <a:p>
-            <a:r>
-              <a:t>    wiederhole 4 mal</a:t>
-            </a:r>
-          </a:p>
-          <a:p>
-            <a:r>
-              <a:t>        Hinlegen</a:t>
-            </a:r>
-          </a:p>
-          <a:p>
-            <a:r>
-              <a:t>        wenn NichtIstWand dann</a:t>
-            </a:r>
-          </a:p>
-          <a:p>
-            <a:r>
-              <a:t>            Schritt</a:t>
-            </a:r>
-          </a:p>
-          <a:p>
-            <a:r>
-              <a:t>        *wenn</a:t>
-            </a:r>
-          </a:p>
-          <a:p>
-            <a:r>
-              <a:t>    *wiederhole</a:t>
-            </a:r>
-          </a:p>
-          <a:p>
-            <a:r>
-              <a:t>*Anweisung</a:t>
-            </a:r>
-          </a:p>
-          <a:p/>
-          <a:p>
-            <a:r>
-              <a:t>Anweisung NaechsteReihe</a:t>
-            </a:r>
-          </a:p>
-          <a:p>
-            <a:r>
-              <a:t>    LinksDrehen</a:t>
-            </a:r>
-          </a:p>
-          <a:p>
-            <a:r>
-              <a:t>    Schritt</a:t>
-            </a:r>
-          </a:p>
-          <a:p>
-            <a:r>
-              <a:t>    LinksDrehen</a:t>
-            </a:r>
-          </a:p>
-          <a:p>
-            <a:r>
-              <a:t>*Anweisung</a:t>
-            </a:r>
-          </a:p>
-          <a:p/>
-          <a:p>
-            <a:r>
-              <a:t>Hauptprogramm:</a:t>
-            </a:r>
-          </a:p>
-          <a:p>
-            <a:r>
-              <a:t>wiederhole 4 mal</a:t>
-            </a:r>
-          </a:p>
-          <a:p>
-            <a:r>
-              <a:t>    ReiheBauen</a:t>
-            </a:r>
-          </a:p>
-          <a:p>
-            <a:r>
-              <a:t>    [Reihenwechsel passend zur Startlage/Welt]</a:t>
-            </a:r>
-          </a:p>
-          <a:p>
-            <a:r>
-              <a:t>*wiederhole</a:t>
-            </a:r>
-          </a:p>
-          <a:p/>
-          <a:p>
-            <a:r>
-              <a:t>Hinweis: Der exakte Reihenwechsel hängt von Startposition, Blickrichtung und gewünschtem Endzustand ab. Deshalb vor Unterrichtsbeginn in der eingesetzten Welt testen. Erwartetes Ergebnis: 4×4-Ziegelfeld. Typische Fehler: Schritt nach letztem Ziegel, falsche Drehrichtung, Reihenwechsel auch nach letzter Reihe.</a:t>
+              <a:t>Vollständiger Karol-Code in Lehrerbemerkungen kopierfertig ergänzen und vor Einsatz mit Karol-Version prüfen.</a:t>
             </a:r>
           </a:p>
         </p:txBody>
@@ -1170,77 +999,7 @@
           <a:lstStyle/>
           <a:p>
             <a:r>
-              <a:t>Schüler sehen bewusst das Struktogramm statt des vollständigen Lösungscodes. Lösungscode bleibt in den Lehrerbemerkungen.</a:t>
-            </a:r>
-          </a:p>
-        </p:txBody>
-      </p:sp>
-      <p:sp>
-        <p:nvSpPr>
-          <p:cNvPr id="4" name="Slide Number Placeholder 3"/>
-          <p:cNvSpPr>
-            <a:spLocks noGrp="1"/>
-          </p:cNvSpPr>
-          <p:nvPr>
-            <p:ph type="sldNum" idx="5" sz="quarter"/>
-          </p:nvPr>
-        </p:nvSpPr>
-        <p:spPr/>
-      </p:sp>
-    </p:spTree>
-  </p:cSld>
-  <p:clrMapOvr>
-    <a:masterClrMapping/>
-  </p:clrMapOvr>
-</p:notes>
-</file>
-
-<file path=ppt/notesSlides/notesSlide9.xml><?xml version="1.0" encoding="utf-8"?>
-<p:notes xmlns:a="http://schemas.openxmlformats.org/drawingml/2006/main" xmlns:p="http://schemas.openxmlformats.org/presentationml/2006/main" xmlns:r="http://schemas.openxmlformats.org/officeDocument/2006/relationships">
-  <p:cSld>
-    <p:spTree>
-      <p:nvGrpSpPr>
-        <p:cNvPr id="1" name=""/>
-        <p:cNvGrpSpPr/>
-        <p:nvPr/>
-      </p:nvGrpSpPr>
-      <p:grpSpPr>
-        <a:xfrm>
-          <a:off x="0" y="0"/>
-          <a:ext cx="0" cy="0"/>
-          <a:chOff x="0" y="0"/>
-          <a:chExt cx="0" cy="0"/>
-        </a:xfrm>
-      </p:grpSpPr>
-      <p:sp>
-        <p:nvSpPr>
-          <p:cNvPr id="2" name="Slide Image Placeholder 1"/>
-          <p:cNvSpPr>
-            <a:spLocks noGrp="1"/>
-          </p:cNvSpPr>
-          <p:nvPr>
-            <p:ph type="sldImg" idx="2"/>
-          </p:nvPr>
-        </p:nvSpPr>
-        <p:spPr/>
-      </p:sp>
-      <p:sp>
-        <p:nvSpPr>
-          <p:cNvPr id="3" name="Notes Placeholder 2"/>
-          <p:cNvSpPr>
-            <a:spLocks noGrp="1"/>
-          </p:cNvSpPr>
-          <p:nvPr>
-            <p:ph type="body" idx="3" sz="quarter"/>
-          </p:nvPr>
-        </p:nvSpPr>
-        <p:spPr/>
-        <p:txBody>
-          <a:bodyPr/>
-          <a:lstStyle/>
-          <a:p>
-            <a:r>
-              <a:t>Differenzierung: 3×6 als leichter Transfer, Rahmen oder Wechselmuster als Erweiterung.</a:t>
+              <a:t>Quellenfolie. Quellenangaben sind für Lehrkraft/Weiterverwendung sichtbar.</a:t>
             </a:r>
           </a:p>
         </p:txBody>
@@ -4261,7 +4020,7 @@
             <a:avLst/>
           </a:prstGeom>
           <a:solidFill>
-            <a:srgbClr val="1F374E"/>
+            <a:srgbClr val="202C3C"/>
           </a:solidFill>
           <a:ln>
             <a:noFill/>
@@ -4297,8 +4056,8 @@
         </p:nvSpPr>
         <p:spPr>
           <a:xfrm>
-            <a:off x="731520" y="1417320"/>
-            <a:ext cx="10698480" cy="1188720"/>
+            <a:off x="731520" y="1554480"/>
+            <a:ext cx="10789920" cy="1097280"/>
           </a:xfrm>
           <a:prstGeom prst="rect">
             <a:avLst/>
@@ -4330,8 +4089,8 @@
         </p:nvSpPr>
         <p:spPr>
           <a:xfrm>
-            <a:off x="777240" y="2971800"/>
-            <a:ext cx="10515600" cy="731520"/>
+            <a:off x="777240" y="3017520"/>
+            <a:ext cx="10515600" cy="640080"/>
           </a:xfrm>
           <a:prstGeom prst="rect">
             <a:avLst/>
@@ -4350,203 +4109,7 @@
                   <a:srgbClr val="FFFFFF"/>
                 </a:solidFill>
               </a:rPr>
-              <a:t>Klasse 8 · Projekt und Kompetenzsicherung</a:t>
-            </a:r>
-          </a:p>
-        </p:txBody>
-      </p:sp>
-    </p:spTree>
-  </p:cSld>
-  <p:clrMapOvr>
-    <a:masterClrMapping/>
-  </p:clrMapOvr>
-</p:sld>
-</file>
-
-<file path=ppt/slides/slide10.xml><?xml version="1.0" encoding="utf-8"?>
-<p:sld xmlns:a="http://schemas.openxmlformats.org/drawingml/2006/main" xmlns:p="http://schemas.openxmlformats.org/presentationml/2006/main" xmlns:r="http://schemas.openxmlformats.org/officeDocument/2006/relationships">
-  <p:cSld>
-    <p:spTree>
-      <p:nvGrpSpPr>
-        <p:cNvPr id="1" name=""/>
-        <p:cNvGrpSpPr/>
-        <p:nvPr/>
-      </p:nvGrpSpPr>
-      <p:grpSpPr/>
-      <p:sp>
-        <p:nvSpPr>
-          <p:cNvPr id="2" name="Rectangle 1"/>
-          <p:cNvSpPr/>
-          <p:nvPr/>
-        </p:nvSpPr>
-        <p:spPr>
-          <a:xfrm>
-            <a:off x="0" y="0"/>
-            <a:ext cx="12191695" cy="100584"/>
-          </a:xfrm>
-          <a:prstGeom prst="rect">
-            <a:avLst/>
-          </a:prstGeom>
-          <a:solidFill>
-            <a:srgbClr val="4472C4"/>
-          </a:solidFill>
-          <a:ln>
-            <a:noFill/>
-          </a:ln>
-        </p:spPr>
-        <p:style>
-          <a:lnRef idx="1">
-            <a:schemeClr val="accent1"/>
-          </a:lnRef>
-          <a:fillRef idx="3">
-            <a:schemeClr val="accent1"/>
-          </a:fillRef>
-          <a:effectRef idx="2">
-            <a:schemeClr val="accent1"/>
-          </a:effectRef>
-          <a:fontRef idx="minor">
-            <a:schemeClr val="lt1"/>
-          </a:fontRef>
-        </p:style>
-        <p:txBody>
-          <a:bodyPr rtlCol="0" anchor="ctr"/>
-          <a:lstStyle/>
-          <a:p>
-            <a:pPr algn="ctr"/>
-          </a:p>
-        </p:txBody>
-      </p:sp>
-      <p:sp>
-        <p:nvSpPr>
-          <p:cNvPr id="3" name="TextBox 2"/>
-          <p:cNvSpPr txBox="1"/>
-          <p:nvPr/>
-        </p:nvSpPr>
-        <p:spPr>
-          <a:xfrm>
-            <a:off x="594360" y="320040"/>
-            <a:ext cx="10972800" cy="502920"/>
-          </a:xfrm>
-          <a:prstGeom prst="rect">
-            <a:avLst/>
-          </a:prstGeom>
-          <a:noFill/>
-        </p:spPr>
-        <p:txBody>
-          <a:bodyPr wrap="none">
-            <a:spAutoFit/>
-          </a:bodyPr>
-          <a:lstStyle/>
-          <a:p>
-            <a:r>
-              <a:rPr sz="2600" b="1">
-                <a:solidFill>
-                  <a:srgbClr val="1F374E"/>
-                </a:solidFill>
-              </a:rPr>
-              <a:t>Quellen</a:t>
-            </a:r>
-          </a:p>
-        </p:txBody>
-      </p:sp>
-      <p:sp>
-        <p:nvSpPr>
-          <p:cNvPr id="4" name="TextBox 3"/>
-          <p:cNvSpPr txBox="1"/>
-          <p:nvPr/>
-        </p:nvSpPr>
-        <p:spPr>
-          <a:xfrm>
-            <a:off x="731520" y="1234440"/>
-            <a:ext cx="10698480" cy="5029200"/>
-          </a:xfrm>
-          <a:prstGeom prst="rect">
-            <a:avLst/>
-          </a:prstGeom>
-          <a:noFill/>
-        </p:spPr>
-        <p:txBody>
-          <a:bodyPr wrap="square">
-            <a:spAutoFit/>
-          </a:bodyPr>
-          <a:lstStyle/>
-          <a:p>
-            <a:pPr>
-              <a:spcAft>
-                <a:spcPts val="800"/>
-              </a:spcAft>
-              <a:defRPr sz="1500">
-                <a:solidFill>
-                  <a:srgbClr val="232323"/>
-                </a:solidFill>
-              </a:defRPr>
-            </a:pPr>
-            <a:r>
-              <a:t>Robot Karol: https://www.schule.bayern.de/karol</a:t>
-            </a:r>
-          </a:p>
-          <a:p>
-            <a:pPr>
-              <a:spcAft>
-                <a:spcPts val="800"/>
-              </a:spcAft>
-              <a:defRPr sz="1500">
-                <a:solidFill>
-                  <a:srgbClr val="232323"/>
-                </a:solidFill>
-              </a:defRPr>
-            </a:pPr>
-            <a:r>
-              <a:t>Sächsischer Lehrplan Oberschule Informatik, Klassenstufe 8: https://www.schulportal.sachsen.de/lplandb/lehrplan/514</a:t>
-            </a:r>
-          </a:p>
-          <a:p>
-            <a:pPr>
-              <a:spcAft>
-                <a:spcPts val="800"/>
-              </a:spcAft>
-              <a:defRPr sz="1500">
-                <a:solidFill>
-                  <a:srgbClr val="232323"/>
-                </a:solidFill>
-              </a:defRPr>
-            </a:pPr>
-            <a:r>
-              <a:t>Zielmuster, Struktogramme und Beispiele: eigene didaktische Darstellung.</a:t>
-            </a:r>
-          </a:p>
-        </p:txBody>
-      </p:sp>
-      <p:sp>
-        <p:nvSpPr>
-          <p:cNvPr id="5" name="TextBox 4"/>
-          <p:cNvSpPr txBox="1"/>
-          <p:nvPr/>
-        </p:nvSpPr>
-        <p:spPr>
-          <a:xfrm>
-            <a:off x="502920" y="6510528"/>
-            <a:ext cx="11064240" cy="182880"/>
-          </a:xfrm>
-          <a:prstGeom prst="rect">
-            <a:avLst/>
-          </a:prstGeom>
-          <a:noFill/>
-        </p:spPr>
-        <p:txBody>
-          <a:bodyPr wrap="none">
-            <a:spAutoFit/>
-          </a:bodyPr>
-          <a:lstStyle/>
-          <a:p>
-            <a:pPr algn="r"/>
-            <a:r>
-              <a:rPr sz="800">
-                <a:solidFill>
-                  <a:srgbClr val="646464"/>
-                </a:solidFill>
-              </a:rPr>
-              <a:t>Quellenangaben · Grafiken: eigene Darstellung</a:t>
+              <a:t>Klasse 8 · Projekt und Sicherung</a:t>
             </a:r>
           </a:p>
         </p:txBody>
@@ -4578,13 +4141,13 @@
         <p:spPr>
           <a:xfrm>
             <a:off x="0" y="0"/>
-            <a:ext cx="12191695" cy="100584"/>
+            <a:ext cx="12191695" cy="109728"/>
           </a:xfrm>
           <a:prstGeom prst="rect">
             <a:avLst/>
           </a:prstGeom>
           <a:solidFill>
-            <a:srgbClr val="4472C4"/>
+            <a:srgbClr val="305396"/>
           </a:solidFill>
           <a:ln>
             <a:noFill/>
@@ -4621,7 +4184,7 @@
         <p:spPr>
           <a:xfrm>
             <a:off x="594360" y="320040"/>
-            <a:ext cx="10972800" cy="502920"/>
+            <a:ext cx="10972800" cy="548640"/>
           </a:xfrm>
           <a:prstGeom prst="rect">
             <a:avLst/>
@@ -4637,7 +4200,7 @@
             <a:r>
               <a:rPr sz="2600" b="1">
                 <a:solidFill>
-                  <a:srgbClr val="1F374E"/>
+                  <a:srgbClr val="202C3C"/>
                 </a:solidFill>
               </a:rPr>
               <a:t>Projektauftrag</a:t>
@@ -4653,18 +4216,18 @@
         </p:nvSpPr>
         <p:spPr>
           <a:xfrm>
-            <a:off x="822960" y="1325880"/>
-            <a:ext cx="10515600" cy="1417320"/>
+            <a:off x="777240" y="1234440"/>
+            <a:ext cx="10789920" cy="1234440"/>
           </a:xfrm>
           <a:prstGeom prst="roundRect">
             <a:avLst/>
           </a:prstGeom>
           <a:solidFill>
-            <a:srgbClr val="DCE6F1"/>
+            <a:srgbClr val="E5ECF6"/>
           </a:solidFill>
           <a:ln>
             <a:solidFill>
-              <a:srgbClr val="4472C4"/>
+              <a:srgbClr val="305396"/>
             </a:solidFill>
           </a:ln>
         </p:spPr>
@@ -4688,12 +4251,12 @@
           <a:p>
             <a:pPr algn="ctr"/>
             <a:r>
-              <a:rPr sz="2400" b="1">
+              <a:rPr sz="2200" b="1">
                 <a:solidFill>
-                  <a:srgbClr val="1F374E"/>
+                  <a:srgbClr val="202C3C"/>
                 </a:solidFill>
               </a:rPr>
-              <a:t>Programmiere Karol so, dass er auf einer leeren Fläche ein 4 × 4-Ziegelfeld erzeugt.</a:t>
+              <a:t>Erzeuge mit Robot Karol auf leerer Fläche ein 4 × 4-Ziegelfeld.</a:t>
             </a:r>
           </a:p>
         </p:txBody>
@@ -4706,8 +4269,8 @@
         </p:nvSpPr>
         <p:spPr>
           <a:xfrm>
-            <a:off x="6629400" y="3246120"/>
-            <a:ext cx="603504" cy="603504"/>
+            <a:off x="6949440" y="2743200"/>
+            <a:ext cx="530352" cy="530352"/>
           </a:xfrm>
           <a:prstGeom prst="rect">
             <a:avLst/>
@@ -4717,7 +4280,7 @@
           </a:solidFill>
           <a:ln>
             <a:solidFill>
-              <a:srgbClr val="646464"/>
+              <a:srgbClr val="6E6E6E"/>
             </a:solidFill>
           </a:ln>
         </p:spPr>
@@ -4740,9 +4303,6 @@
           <a:lstStyle/>
           <a:p>
             <a:pPr algn="ctr"/>
-            <a:r>
-              <a:t>■</a:t>
-            </a:r>
           </a:p>
         </p:txBody>
       </p:sp>
@@ -4754,8 +4314,8 @@
         </p:nvSpPr>
         <p:spPr>
           <a:xfrm>
-            <a:off x="7269480" y="3246120"/>
-            <a:ext cx="603504" cy="603504"/>
+            <a:off x="7516367" y="2743200"/>
+            <a:ext cx="530352" cy="530352"/>
           </a:xfrm>
           <a:prstGeom prst="rect">
             <a:avLst/>
@@ -4765,7 +4325,7 @@
           </a:solidFill>
           <a:ln>
             <a:solidFill>
-              <a:srgbClr val="646464"/>
+              <a:srgbClr val="6E6E6E"/>
             </a:solidFill>
           </a:ln>
         </p:spPr>
@@ -4788,9 +4348,6 @@
           <a:lstStyle/>
           <a:p>
             <a:pPr algn="ctr"/>
-            <a:r>
-              <a:t>■</a:t>
-            </a:r>
           </a:p>
         </p:txBody>
       </p:sp>
@@ -4802,8 +4359,8 @@
         </p:nvSpPr>
         <p:spPr>
           <a:xfrm>
-            <a:off x="7909560" y="3246120"/>
-            <a:ext cx="603504" cy="603504"/>
+            <a:off x="8083296" y="2743200"/>
+            <a:ext cx="530352" cy="530352"/>
           </a:xfrm>
           <a:prstGeom prst="rect">
             <a:avLst/>
@@ -4813,7 +4370,7 @@
           </a:solidFill>
           <a:ln>
             <a:solidFill>
-              <a:srgbClr val="646464"/>
+              <a:srgbClr val="6E6E6E"/>
             </a:solidFill>
           </a:ln>
         </p:spPr>
@@ -4836,9 +4393,6 @@
           <a:lstStyle/>
           <a:p>
             <a:pPr algn="ctr"/>
-            <a:r>
-              <a:t>■</a:t>
-            </a:r>
           </a:p>
         </p:txBody>
       </p:sp>
@@ -4850,8 +4404,8 @@
         </p:nvSpPr>
         <p:spPr>
           <a:xfrm>
-            <a:off x="8549640" y="3246120"/>
-            <a:ext cx="603504" cy="603504"/>
+            <a:off x="8650224" y="2743200"/>
+            <a:ext cx="530352" cy="530352"/>
           </a:xfrm>
           <a:prstGeom prst="rect">
             <a:avLst/>
@@ -4861,7 +4415,7 @@
           </a:solidFill>
           <a:ln>
             <a:solidFill>
-              <a:srgbClr val="646464"/>
+              <a:srgbClr val="6E6E6E"/>
             </a:solidFill>
           </a:ln>
         </p:spPr>
@@ -4884,9 +4438,6 @@
           <a:lstStyle/>
           <a:p>
             <a:pPr algn="ctr"/>
-            <a:r>
-              <a:t>■</a:t>
-            </a:r>
           </a:p>
         </p:txBody>
       </p:sp>
@@ -4898,8 +4449,8 @@
         </p:nvSpPr>
         <p:spPr>
           <a:xfrm>
-            <a:off x="6629400" y="3886200"/>
-            <a:ext cx="603504" cy="603504"/>
+            <a:off x="6949440" y="3310128"/>
+            <a:ext cx="530352" cy="530352"/>
           </a:xfrm>
           <a:prstGeom prst="rect">
             <a:avLst/>
@@ -4909,7 +4460,7 @@
           </a:solidFill>
           <a:ln>
             <a:solidFill>
-              <a:srgbClr val="646464"/>
+              <a:srgbClr val="6E6E6E"/>
             </a:solidFill>
           </a:ln>
         </p:spPr>
@@ -4932,9 +4483,6 @@
           <a:lstStyle/>
           <a:p>
             <a:pPr algn="ctr"/>
-            <a:r>
-              <a:t>■</a:t>
-            </a:r>
           </a:p>
         </p:txBody>
       </p:sp>
@@ -4946,8 +4494,8 @@
         </p:nvSpPr>
         <p:spPr>
           <a:xfrm>
-            <a:off x="7269480" y="3886200"/>
-            <a:ext cx="603504" cy="603504"/>
+            <a:off x="7516367" y="3310128"/>
+            <a:ext cx="530352" cy="530352"/>
           </a:xfrm>
           <a:prstGeom prst="rect">
             <a:avLst/>
@@ -4957,7 +4505,7 @@
           </a:solidFill>
           <a:ln>
             <a:solidFill>
-              <a:srgbClr val="646464"/>
+              <a:srgbClr val="6E6E6E"/>
             </a:solidFill>
           </a:ln>
         </p:spPr>
@@ -4980,9 +4528,6 @@
           <a:lstStyle/>
           <a:p>
             <a:pPr algn="ctr"/>
-            <a:r>
-              <a:t>■</a:t>
-            </a:r>
           </a:p>
         </p:txBody>
       </p:sp>
@@ -4994,8 +4539,8 @@
         </p:nvSpPr>
         <p:spPr>
           <a:xfrm>
-            <a:off x="7909560" y="3886200"/>
-            <a:ext cx="603504" cy="603504"/>
+            <a:off x="8083296" y="3310128"/>
+            <a:ext cx="530352" cy="530352"/>
           </a:xfrm>
           <a:prstGeom prst="rect">
             <a:avLst/>
@@ -5005,7 +4550,7 @@
           </a:solidFill>
           <a:ln>
             <a:solidFill>
-              <a:srgbClr val="646464"/>
+              <a:srgbClr val="6E6E6E"/>
             </a:solidFill>
           </a:ln>
         </p:spPr>
@@ -5028,9 +4573,6 @@
           <a:lstStyle/>
           <a:p>
             <a:pPr algn="ctr"/>
-            <a:r>
-              <a:t>■</a:t>
-            </a:r>
           </a:p>
         </p:txBody>
       </p:sp>
@@ -5042,8 +4584,8 @@
         </p:nvSpPr>
         <p:spPr>
           <a:xfrm>
-            <a:off x="8549640" y="3886200"/>
-            <a:ext cx="603504" cy="603504"/>
+            <a:off x="8650224" y="3310128"/>
+            <a:ext cx="530352" cy="530352"/>
           </a:xfrm>
           <a:prstGeom prst="rect">
             <a:avLst/>
@@ -5053,7 +4595,7 @@
           </a:solidFill>
           <a:ln>
             <a:solidFill>
-              <a:srgbClr val="646464"/>
+              <a:srgbClr val="6E6E6E"/>
             </a:solidFill>
           </a:ln>
         </p:spPr>
@@ -5076,9 +4618,6 @@
           <a:lstStyle/>
           <a:p>
             <a:pPr algn="ctr"/>
-            <a:r>
-              <a:t>■</a:t>
-            </a:r>
           </a:p>
         </p:txBody>
       </p:sp>
@@ -5090,8 +4629,8 @@
         </p:nvSpPr>
         <p:spPr>
           <a:xfrm>
-            <a:off x="6629400" y="4526279"/>
-            <a:ext cx="603504" cy="603504"/>
+            <a:off x="6949440" y="3877056"/>
+            <a:ext cx="530352" cy="530352"/>
           </a:xfrm>
           <a:prstGeom prst="rect">
             <a:avLst/>
@@ -5101,7 +4640,7 @@
           </a:solidFill>
           <a:ln>
             <a:solidFill>
-              <a:srgbClr val="646464"/>
+              <a:srgbClr val="6E6E6E"/>
             </a:solidFill>
           </a:ln>
         </p:spPr>
@@ -5124,9 +4663,6 @@
           <a:lstStyle/>
           <a:p>
             <a:pPr algn="ctr"/>
-            <a:r>
-              <a:t>■</a:t>
-            </a:r>
           </a:p>
         </p:txBody>
       </p:sp>
@@ -5138,8 +4674,8 @@
         </p:nvSpPr>
         <p:spPr>
           <a:xfrm>
-            <a:off x="7269480" y="4526279"/>
-            <a:ext cx="603504" cy="603504"/>
+            <a:off x="7516367" y="3877056"/>
+            <a:ext cx="530352" cy="530352"/>
           </a:xfrm>
           <a:prstGeom prst="rect">
             <a:avLst/>
@@ -5149,7 +4685,7 @@
           </a:solidFill>
           <a:ln>
             <a:solidFill>
-              <a:srgbClr val="646464"/>
+              <a:srgbClr val="6E6E6E"/>
             </a:solidFill>
           </a:ln>
         </p:spPr>
@@ -5172,9 +4708,6 @@
           <a:lstStyle/>
           <a:p>
             <a:pPr algn="ctr"/>
-            <a:r>
-              <a:t>■</a:t>
-            </a:r>
           </a:p>
         </p:txBody>
       </p:sp>
@@ -5186,8 +4719,8 @@
         </p:nvSpPr>
         <p:spPr>
           <a:xfrm>
-            <a:off x="7909560" y="4526279"/>
-            <a:ext cx="603504" cy="603504"/>
+            <a:off x="8083296" y="3877056"/>
+            <a:ext cx="530352" cy="530352"/>
           </a:xfrm>
           <a:prstGeom prst="rect">
             <a:avLst/>
@@ -5197,7 +4730,7 @@
           </a:solidFill>
           <a:ln>
             <a:solidFill>
-              <a:srgbClr val="646464"/>
+              <a:srgbClr val="6E6E6E"/>
             </a:solidFill>
           </a:ln>
         </p:spPr>
@@ -5220,9 +4753,6 @@
           <a:lstStyle/>
           <a:p>
             <a:pPr algn="ctr"/>
-            <a:r>
-              <a:t>■</a:t>
-            </a:r>
           </a:p>
         </p:txBody>
       </p:sp>
@@ -5234,8 +4764,8 @@
         </p:nvSpPr>
         <p:spPr>
           <a:xfrm>
-            <a:off x="8549640" y="4526279"/>
-            <a:ext cx="603504" cy="603504"/>
+            <a:off x="8650224" y="3877056"/>
+            <a:ext cx="530352" cy="530352"/>
           </a:xfrm>
           <a:prstGeom prst="rect">
             <a:avLst/>
@@ -5245,7 +4775,7 @@
           </a:solidFill>
           <a:ln>
             <a:solidFill>
-              <a:srgbClr val="646464"/>
+              <a:srgbClr val="6E6E6E"/>
             </a:solidFill>
           </a:ln>
         </p:spPr>
@@ -5268,9 +4798,6 @@
           <a:lstStyle/>
           <a:p>
             <a:pPr algn="ctr"/>
-            <a:r>
-              <a:t>■</a:t>
-            </a:r>
           </a:p>
         </p:txBody>
       </p:sp>
@@ -5282,8 +4809,8 @@
         </p:nvSpPr>
         <p:spPr>
           <a:xfrm>
-            <a:off x="6629400" y="5166359"/>
-            <a:ext cx="603504" cy="603504"/>
+            <a:off x="6949440" y="4443983"/>
+            <a:ext cx="530352" cy="530352"/>
           </a:xfrm>
           <a:prstGeom prst="rect">
             <a:avLst/>
@@ -5293,7 +4820,7 @@
           </a:solidFill>
           <a:ln>
             <a:solidFill>
-              <a:srgbClr val="646464"/>
+              <a:srgbClr val="6E6E6E"/>
             </a:solidFill>
           </a:ln>
         </p:spPr>
@@ -5316,9 +4843,6 @@
           <a:lstStyle/>
           <a:p>
             <a:pPr algn="ctr"/>
-            <a:r>
-              <a:t>■</a:t>
-            </a:r>
           </a:p>
         </p:txBody>
       </p:sp>
@@ -5330,8 +4854,8 @@
         </p:nvSpPr>
         <p:spPr>
           <a:xfrm>
-            <a:off x="7269480" y="5166359"/>
-            <a:ext cx="603504" cy="603504"/>
+            <a:off x="7516367" y="4443983"/>
+            <a:ext cx="530352" cy="530352"/>
           </a:xfrm>
           <a:prstGeom prst="rect">
             <a:avLst/>
@@ -5341,7 +4865,7 @@
           </a:solidFill>
           <a:ln>
             <a:solidFill>
-              <a:srgbClr val="646464"/>
+              <a:srgbClr val="6E6E6E"/>
             </a:solidFill>
           </a:ln>
         </p:spPr>
@@ -5364,9 +4888,6 @@
           <a:lstStyle/>
           <a:p>
             <a:pPr algn="ctr"/>
-            <a:r>
-              <a:t>■</a:t>
-            </a:r>
           </a:p>
         </p:txBody>
       </p:sp>
@@ -5378,8 +4899,8 @@
         </p:nvSpPr>
         <p:spPr>
           <a:xfrm>
-            <a:off x="7909560" y="5166359"/>
-            <a:ext cx="603504" cy="603504"/>
+            <a:off x="8083296" y="4443983"/>
+            <a:ext cx="530352" cy="530352"/>
           </a:xfrm>
           <a:prstGeom prst="rect">
             <a:avLst/>
@@ -5389,7 +4910,7 @@
           </a:solidFill>
           <a:ln>
             <a:solidFill>
-              <a:srgbClr val="646464"/>
+              <a:srgbClr val="6E6E6E"/>
             </a:solidFill>
           </a:ln>
         </p:spPr>
@@ -5412,9 +4933,6 @@
           <a:lstStyle/>
           <a:p>
             <a:pPr algn="ctr"/>
-            <a:r>
-              <a:t>■</a:t>
-            </a:r>
           </a:p>
         </p:txBody>
       </p:sp>
@@ -5426,8 +4944,8 @@
         </p:nvSpPr>
         <p:spPr>
           <a:xfrm>
-            <a:off x="8549640" y="5166359"/>
-            <a:ext cx="603504" cy="603504"/>
+            <a:off x="8650224" y="4443983"/>
+            <a:ext cx="530352" cy="530352"/>
           </a:xfrm>
           <a:prstGeom prst="rect">
             <a:avLst/>
@@ -5437,7 +4955,7 @@
           </a:solidFill>
           <a:ln>
             <a:solidFill>
-              <a:srgbClr val="646464"/>
+              <a:srgbClr val="6E6E6E"/>
             </a:solidFill>
           </a:ln>
         </p:spPr>
@@ -5460,9 +4978,6 @@
           <a:lstStyle/>
           <a:p>
             <a:pPr algn="ctr"/>
-            <a:r>
-              <a:t>■</a:t>
-            </a:r>
           </a:p>
         </p:txBody>
       </p:sp>
@@ -5474,18 +4989,18 @@
         </p:nvSpPr>
         <p:spPr>
           <a:xfrm>
-            <a:off x="5623560" y="3840480"/>
-            <a:ext cx="731520" cy="731520"/>
+            <a:off x="6035040" y="3246120"/>
+            <a:ext cx="658368" cy="658368"/>
           </a:xfrm>
           <a:prstGeom prst="roundRect">
             <a:avLst/>
           </a:prstGeom>
           <a:solidFill>
-            <a:srgbClr val="FFE699"/>
+            <a:srgbClr val="FFE899"/>
           </a:solidFill>
           <a:ln>
             <a:solidFill>
-              <a:srgbClr val="4472C4"/>
+              <a:srgbClr val="305396"/>
             </a:solidFill>
           </a:ln>
         </p:spPr>
@@ -5509,9 +5024,9 @@
           <a:p>
             <a:pPr algn="ctr"/>
             <a:r>
-              <a:rPr sz="1800" b="1">
+              <a:rPr sz="1700" b="1">
                 <a:solidFill>
-                  <a:srgbClr val="1F374E"/>
+                  <a:srgbClr val="202C3C"/>
                 </a:solidFill>
               </a:rPr>
               <a:t>K</a:t>
@@ -5527,8 +5042,8 @@
         </p:nvSpPr>
         <p:spPr>
           <a:xfrm>
-            <a:off x="502920" y="6510528"/>
-            <a:ext cx="11064240" cy="182880"/>
+            <a:off x="365760" y="6510528"/>
+            <a:ext cx="11430000" cy="228600"/>
           </a:xfrm>
           <a:prstGeom prst="rect">
             <a:avLst/>
@@ -5545,7 +5060,7 @@
             <a:r>
               <a:rPr sz="800">
                 <a:solidFill>
-                  <a:srgbClr val="646464"/>
+                  <a:srgbClr val="6E6E6E"/>
                 </a:solidFill>
               </a:rPr>
               <a:t>Grafik: eigene Darstellung</a:t>
@@ -5580,13 +5095,13 @@
         <p:spPr>
           <a:xfrm>
             <a:off x="0" y="0"/>
-            <a:ext cx="12191695" cy="100584"/>
+            <a:ext cx="12191695" cy="109728"/>
           </a:xfrm>
           <a:prstGeom prst="rect">
             <a:avLst/>
           </a:prstGeom>
           <a:solidFill>
-            <a:srgbClr val="4472C4"/>
+            <a:srgbClr val="305396"/>
           </a:solidFill>
           <a:ln>
             <a:noFill/>
@@ -5623,7 +5138,7 @@
         <p:spPr>
           <a:xfrm>
             <a:off x="594360" y="320040"/>
-            <a:ext cx="10972800" cy="502920"/>
+            <a:ext cx="10972800" cy="548640"/>
           </a:xfrm>
           <a:prstGeom prst="rect">
             <a:avLst/>
@@ -5639,10 +5154,10 @@
             <a:r>
               <a:rPr sz="2600" b="1">
                 <a:solidFill>
-                  <a:srgbClr val="1F374E"/>
+                  <a:srgbClr val="202C3C"/>
                 </a:solidFill>
               </a:rPr>
-              <a:t>Was soll dein Programm zeigen?</a:t>
+              <a:t>Was muss dein Programm zeigen?</a:t>
             </a:r>
           </a:p>
         </p:txBody>
@@ -5656,7 +5171,7 @@
         <p:spPr>
           <a:xfrm>
             <a:off x="685800" y="1234440"/>
-            <a:ext cx="5303520" cy="4937760"/>
+            <a:ext cx="5394960" cy="5029200"/>
           </a:xfrm>
           <a:prstGeom prst="rect">
             <a:avLst/>
@@ -5671,11 +5186,11 @@
           <a:p>
             <a:pPr>
               <a:spcAft>
-                <a:spcPts val="800"/>
+                <a:spcPts val="700"/>
               </a:spcAft>
               <a:defRPr sz="1900">
                 <a:solidFill>
-                  <a:srgbClr val="232323"/>
+                  <a:srgbClr val="1E1E1E"/>
                 </a:solidFill>
               </a:defRPr>
             </a:pPr>
@@ -5686,11 +5201,11 @@
           <a:p>
             <a:pPr>
               <a:spcAft>
-                <a:spcPts val="800"/>
+                <a:spcPts val="700"/>
               </a:spcAft>
               <a:defRPr sz="1900">
                 <a:solidFill>
-                  <a:srgbClr val="232323"/>
+                  <a:srgbClr val="1E1E1E"/>
                 </a:solidFill>
               </a:defRPr>
             </a:pPr>
@@ -5701,31 +5216,46 @@
           <a:p>
             <a:pPr>
               <a:spcAft>
-                <a:spcPts val="800"/>
+                <a:spcPts val="700"/>
               </a:spcAft>
               <a:defRPr sz="1900">
                 <a:solidFill>
-                  <a:srgbClr val="232323"/>
+                  <a:srgbClr val="1E1E1E"/>
                 </a:solidFill>
               </a:defRPr>
             </a:pPr>
             <a:r>
-              <a:t>mindestens eine eigene Anweisung für eine wiederkehrende Teilaufgabe</a:t>
+              <a:t>mindestens eine eigene Anweisung</a:t>
             </a:r>
           </a:p>
           <a:p>
             <a:pPr>
               <a:spcAft>
-                <a:spcPts val="800"/>
+                <a:spcPts val="700"/>
               </a:spcAft>
               <a:defRPr sz="1900">
                 <a:solidFill>
-                  <a:srgbClr val="232323"/>
+                  <a:srgbClr val="1E1E1E"/>
                 </a:solidFill>
               </a:defRPr>
             </a:pPr>
             <a:r>
-              <a:t>saubere Einrückung und verständliche Namen</a:t>
+              <a:t>saubere Einrückung</a:t>
+            </a:r>
+          </a:p>
+          <a:p>
+            <a:pPr>
+              <a:spcAft>
+                <a:spcPts val="700"/>
+              </a:spcAft>
+              <a:defRPr sz="1900">
+                <a:solidFill>
+                  <a:srgbClr val="1E1E1E"/>
+                </a:solidFill>
+              </a:defRPr>
+            </a:pPr>
+            <a:r>
+              <a:t>verständliche Namen</a:t>
             </a:r>
           </a:p>
         </p:txBody>
@@ -5738,8 +5268,8 @@
         </p:nvSpPr>
         <p:spPr>
           <a:xfrm>
-            <a:off x="6629400" y="1325880"/>
-            <a:ext cx="603504" cy="603504"/>
+            <a:off x="6858000" y="1463040"/>
+            <a:ext cx="530352" cy="530352"/>
           </a:xfrm>
           <a:prstGeom prst="rect">
             <a:avLst/>
@@ -5749,7 +5279,7 @@
           </a:solidFill>
           <a:ln>
             <a:solidFill>
-              <a:srgbClr val="646464"/>
+              <a:srgbClr val="6E6E6E"/>
             </a:solidFill>
           </a:ln>
         </p:spPr>
@@ -5772,9 +5302,6 @@
           <a:lstStyle/>
           <a:p>
             <a:pPr algn="ctr"/>
-            <a:r>
-              <a:t>■</a:t>
-            </a:r>
           </a:p>
         </p:txBody>
       </p:sp>
@@ -5786,8 +5313,8 @@
         </p:nvSpPr>
         <p:spPr>
           <a:xfrm>
-            <a:off x="7269480" y="1325880"/>
-            <a:ext cx="603504" cy="603504"/>
+            <a:off x="7424927" y="1463040"/>
+            <a:ext cx="530352" cy="530352"/>
           </a:xfrm>
           <a:prstGeom prst="rect">
             <a:avLst/>
@@ -5797,7 +5324,7 @@
           </a:solidFill>
           <a:ln>
             <a:solidFill>
-              <a:srgbClr val="646464"/>
+              <a:srgbClr val="6E6E6E"/>
             </a:solidFill>
           </a:ln>
         </p:spPr>
@@ -5820,9 +5347,6 @@
           <a:lstStyle/>
           <a:p>
             <a:pPr algn="ctr"/>
-            <a:r>
-              <a:t>■</a:t>
-            </a:r>
           </a:p>
         </p:txBody>
       </p:sp>
@@ -5834,8 +5358,8 @@
         </p:nvSpPr>
         <p:spPr>
           <a:xfrm>
-            <a:off x="7909560" y="1325880"/>
-            <a:ext cx="603504" cy="603504"/>
+            <a:off x="7991856" y="1463040"/>
+            <a:ext cx="530352" cy="530352"/>
           </a:xfrm>
           <a:prstGeom prst="rect">
             <a:avLst/>
@@ -5845,7 +5369,7 @@
           </a:solidFill>
           <a:ln>
             <a:solidFill>
-              <a:srgbClr val="646464"/>
+              <a:srgbClr val="6E6E6E"/>
             </a:solidFill>
           </a:ln>
         </p:spPr>
@@ -5868,9 +5392,6 @@
           <a:lstStyle/>
           <a:p>
             <a:pPr algn="ctr"/>
-            <a:r>
-              <a:t>■</a:t>
-            </a:r>
           </a:p>
         </p:txBody>
       </p:sp>
@@ -5882,8 +5403,8 @@
         </p:nvSpPr>
         <p:spPr>
           <a:xfrm>
-            <a:off x="8549640" y="1325880"/>
-            <a:ext cx="603504" cy="603504"/>
+            <a:off x="8558784" y="1463040"/>
+            <a:ext cx="530352" cy="530352"/>
           </a:xfrm>
           <a:prstGeom prst="rect">
             <a:avLst/>
@@ -5893,7 +5414,7 @@
           </a:solidFill>
           <a:ln>
             <a:solidFill>
-              <a:srgbClr val="646464"/>
+              <a:srgbClr val="6E6E6E"/>
             </a:solidFill>
           </a:ln>
         </p:spPr>
@@ -5916,9 +5437,6 @@
           <a:lstStyle/>
           <a:p>
             <a:pPr algn="ctr"/>
-            <a:r>
-              <a:t>■</a:t>
-            </a:r>
           </a:p>
         </p:txBody>
       </p:sp>
@@ -5930,8 +5448,8 @@
         </p:nvSpPr>
         <p:spPr>
           <a:xfrm>
-            <a:off x="6629400" y="1965960"/>
-            <a:ext cx="603504" cy="603504"/>
+            <a:off x="6858000" y="2029968"/>
+            <a:ext cx="530352" cy="530352"/>
           </a:xfrm>
           <a:prstGeom prst="rect">
             <a:avLst/>
@@ -5941,7 +5459,7 @@
           </a:solidFill>
           <a:ln>
             <a:solidFill>
-              <a:srgbClr val="646464"/>
+              <a:srgbClr val="6E6E6E"/>
             </a:solidFill>
           </a:ln>
         </p:spPr>
@@ -5964,9 +5482,6 @@
           <a:lstStyle/>
           <a:p>
             <a:pPr algn="ctr"/>
-            <a:r>
-              <a:t>■</a:t>
-            </a:r>
           </a:p>
         </p:txBody>
       </p:sp>
@@ -5978,8 +5493,8 @@
         </p:nvSpPr>
         <p:spPr>
           <a:xfrm>
-            <a:off x="7269480" y="1965960"/>
-            <a:ext cx="603504" cy="603504"/>
+            <a:off x="7424927" y="2029968"/>
+            <a:ext cx="530352" cy="530352"/>
           </a:xfrm>
           <a:prstGeom prst="rect">
             <a:avLst/>
@@ -5989,7 +5504,7 @@
           </a:solidFill>
           <a:ln>
             <a:solidFill>
-              <a:srgbClr val="646464"/>
+              <a:srgbClr val="6E6E6E"/>
             </a:solidFill>
           </a:ln>
         </p:spPr>
@@ -6012,9 +5527,6 @@
           <a:lstStyle/>
           <a:p>
             <a:pPr algn="ctr"/>
-            <a:r>
-              <a:t>■</a:t>
-            </a:r>
           </a:p>
         </p:txBody>
       </p:sp>
@@ -6026,8 +5538,8 @@
         </p:nvSpPr>
         <p:spPr>
           <a:xfrm>
-            <a:off x="7909560" y="1965960"/>
-            <a:ext cx="603504" cy="603504"/>
+            <a:off x="7991856" y="2029968"/>
+            <a:ext cx="530352" cy="530352"/>
           </a:xfrm>
           <a:prstGeom prst="rect">
             <a:avLst/>
@@ -6037,7 +5549,7 @@
           </a:solidFill>
           <a:ln>
             <a:solidFill>
-              <a:srgbClr val="646464"/>
+              <a:srgbClr val="6E6E6E"/>
             </a:solidFill>
           </a:ln>
         </p:spPr>
@@ -6060,9 +5572,6 @@
           <a:lstStyle/>
           <a:p>
             <a:pPr algn="ctr"/>
-            <a:r>
-              <a:t>■</a:t>
-            </a:r>
           </a:p>
         </p:txBody>
       </p:sp>
@@ -6074,8 +5583,8 @@
         </p:nvSpPr>
         <p:spPr>
           <a:xfrm>
-            <a:off x="8549640" y="1965960"/>
-            <a:ext cx="603504" cy="603504"/>
+            <a:off x="8558784" y="2029968"/>
+            <a:ext cx="530352" cy="530352"/>
           </a:xfrm>
           <a:prstGeom prst="rect">
             <a:avLst/>
@@ -6085,7 +5594,7 @@
           </a:solidFill>
           <a:ln>
             <a:solidFill>
-              <a:srgbClr val="646464"/>
+              <a:srgbClr val="6E6E6E"/>
             </a:solidFill>
           </a:ln>
         </p:spPr>
@@ -6108,9 +5617,6 @@
           <a:lstStyle/>
           <a:p>
             <a:pPr algn="ctr"/>
-            <a:r>
-              <a:t>■</a:t>
-            </a:r>
           </a:p>
         </p:txBody>
       </p:sp>
@@ -6122,8 +5628,8 @@
         </p:nvSpPr>
         <p:spPr>
           <a:xfrm>
-            <a:off x="6629400" y="2606039"/>
-            <a:ext cx="603504" cy="603504"/>
+            <a:off x="6858000" y="2596896"/>
+            <a:ext cx="530352" cy="530352"/>
           </a:xfrm>
           <a:prstGeom prst="rect">
             <a:avLst/>
@@ -6133,7 +5639,7 @@
           </a:solidFill>
           <a:ln>
             <a:solidFill>
-              <a:srgbClr val="646464"/>
+              <a:srgbClr val="6E6E6E"/>
             </a:solidFill>
           </a:ln>
         </p:spPr>
@@ -6156,9 +5662,6 @@
           <a:lstStyle/>
           <a:p>
             <a:pPr algn="ctr"/>
-            <a:r>
-              <a:t>■</a:t>
-            </a:r>
           </a:p>
         </p:txBody>
       </p:sp>
@@ -6170,8 +5673,8 @@
         </p:nvSpPr>
         <p:spPr>
           <a:xfrm>
-            <a:off x="7269480" y="2606039"/>
-            <a:ext cx="603504" cy="603504"/>
+            <a:off x="7424927" y="2596896"/>
+            <a:ext cx="530352" cy="530352"/>
           </a:xfrm>
           <a:prstGeom prst="rect">
             <a:avLst/>
@@ -6181,7 +5684,7 @@
           </a:solidFill>
           <a:ln>
             <a:solidFill>
-              <a:srgbClr val="646464"/>
+              <a:srgbClr val="6E6E6E"/>
             </a:solidFill>
           </a:ln>
         </p:spPr>
@@ -6204,9 +5707,6 @@
           <a:lstStyle/>
           <a:p>
             <a:pPr algn="ctr"/>
-            <a:r>
-              <a:t>■</a:t>
-            </a:r>
           </a:p>
         </p:txBody>
       </p:sp>
@@ -6218,8 +5718,8 @@
         </p:nvSpPr>
         <p:spPr>
           <a:xfrm>
-            <a:off x="7909560" y="2606039"/>
-            <a:ext cx="603504" cy="603504"/>
+            <a:off x="7991856" y="2596896"/>
+            <a:ext cx="530352" cy="530352"/>
           </a:xfrm>
           <a:prstGeom prst="rect">
             <a:avLst/>
@@ -6229,7 +5729,7 @@
           </a:solidFill>
           <a:ln>
             <a:solidFill>
-              <a:srgbClr val="646464"/>
+              <a:srgbClr val="6E6E6E"/>
             </a:solidFill>
           </a:ln>
         </p:spPr>
@@ -6252,9 +5752,6 @@
           <a:lstStyle/>
           <a:p>
             <a:pPr algn="ctr"/>
-            <a:r>
-              <a:t>■</a:t>
-            </a:r>
           </a:p>
         </p:txBody>
       </p:sp>
@@ -6266,8 +5763,8 @@
         </p:nvSpPr>
         <p:spPr>
           <a:xfrm>
-            <a:off x="8549640" y="2606039"/>
-            <a:ext cx="603504" cy="603504"/>
+            <a:off x="8558784" y="2596896"/>
+            <a:ext cx="530352" cy="530352"/>
           </a:xfrm>
           <a:prstGeom prst="rect">
             <a:avLst/>
@@ -6277,7 +5774,7 @@
           </a:solidFill>
           <a:ln>
             <a:solidFill>
-              <a:srgbClr val="646464"/>
+              <a:srgbClr val="6E6E6E"/>
             </a:solidFill>
           </a:ln>
         </p:spPr>
@@ -6300,9 +5797,6 @@
           <a:lstStyle/>
           <a:p>
             <a:pPr algn="ctr"/>
-            <a:r>
-              <a:t>■</a:t>
-            </a:r>
           </a:p>
         </p:txBody>
       </p:sp>
@@ -6314,8 +5808,8 @@
         </p:nvSpPr>
         <p:spPr>
           <a:xfrm>
-            <a:off x="6629400" y="3246120"/>
-            <a:ext cx="603504" cy="603504"/>
+            <a:off x="6858000" y="3163824"/>
+            <a:ext cx="530352" cy="530352"/>
           </a:xfrm>
           <a:prstGeom prst="rect">
             <a:avLst/>
@@ -6325,7 +5819,7 @@
           </a:solidFill>
           <a:ln>
             <a:solidFill>
-              <a:srgbClr val="646464"/>
+              <a:srgbClr val="6E6E6E"/>
             </a:solidFill>
           </a:ln>
         </p:spPr>
@@ -6348,9 +5842,6 @@
           <a:lstStyle/>
           <a:p>
             <a:pPr algn="ctr"/>
-            <a:r>
-              <a:t>■</a:t>
-            </a:r>
           </a:p>
         </p:txBody>
       </p:sp>
@@ -6362,8 +5853,8 @@
         </p:nvSpPr>
         <p:spPr>
           <a:xfrm>
-            <a:off x="7269480" y="3246120"/>
-            <a:ext cx="603504" cy="603504"/>
+            <a:off x="7424927" y="3163824"/>
+            <a:ext cx="530352" cy="530352"/>
           </a:xfrm>
           <a:prstGeom prst="rect">
             <a:avLst/>
@@ -6373,7 +5864,7 @@
           </a:solidFill>
           <a:ln>
             <a:solidFill>
-              <a:srgbClr val="646464"/>
+              <a:srgbClr val="6E6E6E"/>
             </a:solidFill>
           </a:ln>
         </p:spPr>
@@ -6396,9 +5887,6 @@
           <a:lstStyle/>
           <a:p>
             <a:pPr algn="ctr"/>
-            <a:r>
-              <a:t>■</a:t>
-            </a:r>
           </a:p>
         </p:txBody>
       </p:sp>
@@ -6410,8 +5898,8 @@
         </p:nvSpPr>
         <p:spPr>
           <a:xfrm>
-            <a:off x="7909560" y="3246120"/>
-            <a:ext cx="603504" cy="603504"/>
+            <a:off x="7991856" y="3163824"/>
+            <a:ext cx="530352" cy="530352"/>
           </a:xfrm>
           <a:prstGeom prst="rect">
             <a:avLst/>
@@ -6421,7 +5909,7 @@
           </a:solidFill>
           <a:ln>
             <a:solidFill>
-              <a:srgbClr val="646464"/>
+              <a:srgbClr val="6E6E6E"/>
             </a:solidFill>
           </a:ln>
         </p:spPr>
@@ -6444,9 +5932,6 @@
           <a:lstStyle/>
           <a:p>
             <a:pPr algn="ctr"/>
-            <a:r>
-              <a:t>■</a:t>
-            </a:r>
           </a:p>
         </p:txBody>
       </p:sp>
@@ -6458,8 +5943,8 @@
         </p:nvSpPr>
         <p:spPr>
           <a:xfrm>
-            <a:off x="8549640" y="3246120"/>
-            <a:ext cx="603504" cy="603504"/>
+            <a:off x="8558784" y="3163824"/>
+            <a:ext cx="530352" cy="530352"/>
           </a:xfrm>
           <a:prstGeom prst="rect">
             <a:avLst/>
@@ -6469,7 +5954,7 @@
           </a:solidFill>
           <a:ln>
             <a:solidFill>
-              <a:srgbClr val="646464"/>
+              <a:srgbClr val="6E6E6E"/>
             </a:solidFill>
           </a:ln>
         </p:spPr>
@@ -6492,9 +5977,6 @@
           <a:lstStyle/>
           <a:p>
             <a:pPr algn="ctr"/>
-            <a:r>
-              <a:t>■</a:t>
-            </a:r>
           </a:p>
         </p:txBody>
       </p:sp>
@@ -6506,18 +5988,18 @@
         </p:nvSpPr>
         <p:spPr>
           <a:xfrm>
-            <a:off x="5623560" y="1920240"/>
-            <a:ext cx="731520" cy="731520"/>
+            <a:off x="5943600" y="1965960"/>
+            <a:ext cx="658368" cy="658368"/>
           </a:xfrm>
           <a:prstGeom prst="roundRect">
             <a:avLst/>
           </a:prstGeom>
           <a:solidFill>
-            <a:srgbClr val="FFE699"/>
+            <a:srgbClr val="FFE899"/>
           </a:solidFill>
           <a:ln>
             <a:solidFill>
-              <a:srgbClr val="4472C4"/>
+              <a:srgbClr val="305396"/>
             </a:solidFill>
           </a:ln>
         </p:spPr>
@@ -6541,9 +6023,9 @@
           <a:p>
             <a:pPr algn="ctr"/>
             <a:r>
-              <a:rPr sz="1800" b="1">
+              <a:rPr sz="1700" b="1">
                 <a:solidFill>
-                  <a:srgbClr val="1F374E"/>
+                  <a:srgbClr val="202C3C"/>
                 </a:solidFill>
               </a:rPr>
               <a:t>K</a:t>
@@ -6559,8 +6041,8 @@
         </p:nvSpPr>
         <p:spPr>
           <a:xfrm>
-            <a:off x="502920" y="6510528"/>
-            <a:ext cx="11064240" cy="182880"/>
+            <a:off x="365760" y="6510528"/>
+            <a:ext cx="11430000" cy="228600"/>
           </a:xfrm>
           <a:prstGeom prst="rect">
             <a:avLst/>
@@ -6577,7 +6059,7 @@
             <a:r>
               <a:rPr sz="800">
                 <a:solidFill>
-                  <a:srgbClr val="646464"/>
+                  <a:srgbClr val="6E6E6E"/>
                 </a:solidFill>
               </a:rPr>
               <a:t>Grafik: eigene Darstellung</a:t>
@@ -6612,13 +6094,13 @@
         <p:spPr>
           <a:xfrm>
             <a:off x="0" y="0"/>
-            <a:ext cx="12191695" cy="100584"/>
+            <a:ext cx="12191695" cy="109728"/>
           </a:xfrm>
           <a:prstGeom prst="rect">
             <a:avLst/>
           </a:prstGeom>
           <a:solidFill>
-            <a:srgbClr val="4472C4"/>
+            <a:srgbClr val="305396"/>
           </a:solidFill>
           <a:ln>
             <a:noFill/>
@@ -6655,7 +6137,7 @@
         <p:spPr>
           <a:xfrm>
             <a:off x="594360" y="320040"/>
-            <a:ext cx="10972800" cy="502920"/>
+            <a:ext cx="10972800" cy="548640"/>
           </a:xfrm>
           <a:prstGeom prst="rect">
             <a:avLst/>
@@ -6671,10 +6153,10 @@
             <a:r>
               <a:rPr sz="2600" b="1">
                 <a:solidFill>
-                  <a:srgbClr val="1F374E"/>
+                  <a:srgbClr val="202C3C"/>
                 </a:solidFill>
               </a:rPr>
-              <a:t>Zerlege das Problem</a:t>
+              <a:t>Teilprobleme bilden</a:t>
             </a:r>
           </a:p>
         </p:txBody>
@@ -6688,7 +6170,7 @@
         <p:spPr>
           <a:xfrm>
             <a:off x="685800" y="1234440"/>
-            <a:ext cx="5303520" cy="4937760"/>
+            <a:ext cx="5394960" cy="5029200"/>
           </a:xfrm>
           <a:prstGeom prst="rect">
             <a:avLst/>
@@ -6703,61 +6185,61 @@
           <a:p>
             <a:pPr>
               <a:spcAft>
-                <a:spcPts val="800"/>
+                <a:spcPts val="700"/>
               </a:spcAft>
               <a:defRPr sz="1900">
                 <a:solidFill>
-                  <a:srgbClr val="232323"/>
+                  <a:srgbClr val="1E1E1E"/>
                 </a:solidFill>
               </a:defRPr>
             </a:pPr>
             <a:r>
-              <a:t>Wie baust du eine einzelne Reihe?</a:t>
+              <a:t>eine Reihe bauen</a:t>
             </a:r>
           </a:p>
           <a:p>
             <a:pPr>
               <a:spcAft>
-                <a:spcPts val="800"/>
+                <a:spcPts val="700"/>
               </a:spcAft>
               <a:defRPr sz="1900">
                 <a:solidFill>
-                  <a:srgbClr val="232323"/>
+                  <a:srgbClr val="1E1E1E"/>
                 </a:solidFill>
               </a:defRPr>
             </a:pPr>
             <a:r>
-              <a:t>Wie wechselst du zur nächsten Reihe?</a:t>
+              <a:t>zur nächsten Reihe wechseln</a:t>
             </a:r>
           </a:p>
           <a:p>
             <a:pPr>
               <a:spcAft>
-                <a:spcPts val="800"/>
+                <a:spcPts val="700"/>
               </a:spcAft>
               <a:defRPr sz="1900">
                 <a:solidFill>
-                  <a:srgbClr val="232323"/>
+                  <a:srgbClr val="1E1E1E"/>
                 </a:solidFill>
               </a:defRPr>
             </a:pPr>
             <a:r>
-              <a:t>Welche Schritte wiederholen sich?</a:t>
+              <a:t>vier Reihen erzeugen</a:t>
             </a:r>
           </a:p>
           <a:p>
             <a:pPr>
               <a:spcAft>
-                <a:spcPts val="800"/>
+                <a:spcPts val="700"/>
               </a:spcAft>
               <a:defRPr sz="1900">
                 <a:solidFill>
-                  <a:srgbClr val="232323"/>
+                  <a:srgbClr val="1E1E1E"/>
                 </a:solidFill>
               </a:defRPr>
             </a:pPr>
             <a:r>
-              <a:t>Welche Teilaufgabe lohnt sich als eigene Anweisung?</a:t>
+              <a:t>Teilaufgaben wiederverwenden</a:t>
             </a:r>
           </a:p>
         </p:txBody>
@@ -6770,18 +6252,18 @@
         </p:nvSpPr>
         <p:spPr>
           <a:xfrm>
-            <a:off x="6217920" y="1188720"/>
-            <a:ext cx="5029200" cy="566928"/>
+            <a:off x="6309360" y="1280160"/>
+            <a:ext cx="5029200" cy="530352"/>
           </a:xfrm>
           <a:prstGeom prst="roundRect">
             <a:avLst/>
           </a:prstGeom>
           <a:solidFill>
-            <a:srgbClr val="DCE6F1"/>
+            <a:srgbClr val="E5ECF6"/>
           </a:solidFill>
           <a:ln>
             <a:solidFill>
-              <a:srgbClr val="4472C4"/>
+              <a:srgbClr val="305396"/>
             </a:solidFill>
           </a:ln>
         </p:spPr>
@@ -6805,9 +6287,9 @@
           <a:p>
             <a:pPr algn="ctr"/>
             <a:r>
-              <a:rPr sz="1300" b="1">
+              <a:rPr sz="1200" b="1">
                 <a:solidFill>
-                  <a:srgbClr val="1F374E"/>
+                  <a:srgbClr val="202C3C"/>
                 </a:solidFill>
               </a:rPr>
               <a:t>4 Reihen erzeugen</a:t>
@@ -6823,18 +6305,18 @@
         </p:nvSpPr>
         <p:spPr>
           <a:xfrm>
-            <a:off x="6537959" y="1828800"/>
-            <a:ext cx="4389120" cy="566928"/>
+            <a:off x="6629400" y="1892807"/>
+            <a:ext cx="4389120" cy="530352"/>
           </a:xfrm>
           <a:prstGeom prst="roundRect">
             <a:avLst/>
           </a:prstGeom>
           <a:solidFill>
-            <a:srgbClr val="F2F6FA"/>
+            <a:srgbClr val="FFE899"/>
           </a:solidFill>
           <a:ln>
             <a:solidFill>
-              <a:srgbClr val="4472C4"/>
+              <a:srgbClr val="305396"/>
             </a:solidFill>
           </a:ln>
         </p:spPr>
@@ -6858,9 +6340,9 @@
           <a:p>
             <a:pPr algn="ctr"/>
             <a:r>
-              <a:rPr sz="1300" b="1">
+              <a:rPr sz="1200" b="1">
                 <a:solidFill>
-                  <a:srgbClr val="1F374E"/>
+                  <a:srgbClr val="202C3C"/>
                 </a:solidFill>
               </a:rPr>
               <a:t>eine Reihe bauen</a:t>
@@ -6876,18 +6358,18 @@
         </p:nvSpPr>
         <p:spPr>
           <a:xfrm>
-            <a:off x="6537959" y="2468880"/>
-            <a:ext cx="4389120" cy="566928"/>
+            <a:off x="6629400" y="2505456"/>
+            <a:ext cx="4389120" cy="530352"/>
           </a:xfrm>
           <a:prstGeom prst="roundRect">
             <a:avLst/>
           </a:prstGeom>
           <a:solidFill>
-            <a:srgbClr val="F2F6FA"/>
+            <a:srgbClr val="FFE899"/>
           </a:solidFill>
           <a:ln>
             <a:solidFill>
-              <a:srgbClr val="4472C4"/>
+              <a:srgbClr val="305396"/>
             </a:solidFill>
           </a:ln>
         </p:spPr>
@@ -6911,9 +6393,9 @@
           <a:p>
             <a:pPr algn="ctr"/>
             <a:r>
-              <a:rPr sz="1300" b="1">
+              <a:rPr sz="1200" b="1">
                 <a:solidFill>
-                  <a:srgbClr val="1F374E"/>
+                  <a:srgbClr val="202C3C"/>
                 </a:solidFill>
               </a:rPr>
               <a:t>zur nächsten Reihe wechseln</a:t>
@@ -6923,14 +6405,67 @@
       </p:sp>
       <p:sp>
         <p:nvSpPr>
-          <p:cNvPr id="8" name="TextBox 7"/>
+          <p:cNvPr id="8" name="Rounded Rectangle 7"/>
+          <p:cNvSpPr/>
+          <p:nvPr/>
+        </p:nvSpPr>
+        <p:spPr>
+          <a:xfrm>
+            <a:off x="6309360" y="3118103"/>
+            <a:ext cx="5029200" cy="530352"/>
+          </a:xfrm>
+          <a:prstGeom prst="roundRect">
+            <a:avLst/>
+          </a:prstGeom>
+          <a:solidFill>
+            <a:srgbClr val="E5ECF6"/>
+          </a:solidFill>
+          <a:ln>
+            <a:solidFill>
+              <a:srgbClr val="305396"/>
+            </a:solidFill>
+          </a:ln>
+        </p:spPr>
+        <p:style>
+          <a:lnRef idx="1">
+            <a:schemeClr val="accent1"/>
+          </a:lnRef>
+          <a:fillRef idx="3">
+            <a:schemeClr val="accent1"/>
+          </a:fillRef>
+          <a:effectRef idx="2">
+            <a:schemeClr val="accent1"/>
+          </a:effectRef>
+          <a:fontRef idx="minor">
+            <a:schemeClr val="lt1"/>
+          </a:fontRef>
+        </p:style>
+        <p:txBody>
+          <a:bodyPr rtlCol="0" anchor="ctr" wrap="square"/>
+          <a:lstStyle/>
+          <a:p>
+            <a:pPr algn="ctr"/>
+            <a:r>
+              <a:rPr sz="1200" b="1">
+                <a:solidFill>
+                  <a:srgbClr val="202C3C"/>
+                </a:solidFill>
+              </a:rPr>
+              <a:t>wiederholen</a:t>
+            </a:r>
+          </a:p>
+        </p:txBody>
+      </p:sp>
+      <p:sp>
+        <p:nvSpPr>
+          <p:cNvPr id="9" name="TextBox 8"/>
           <p:cNvSpPr txBox="1"/>
           <p:nvPr/>
         </p:nvSpPr>
         <p:spPr>
           <a:xfrm>
-            <a:off x="502920" y="6510528"/>
-            <a:ext cx="11064240" cy="182880"/>
+            <a:off x="365760" y="6510528"/>
+            <a:ext cx="11430000" cy="228600"/>
           </a:xfrm>
           <a:prstGeom prst="rect">
             <a:avLst/>
@@ -6947,7 +6482,7 @@
             <a:r>
               <a:rPr sz="800">
                 <a:solidFill>
-                  <a:srgbClr val="646464"/>
+                  <a:srgbClr val="6E6E6E"/>
                 </a:solidFill>
               </a:rPr>
               <a:t>Grafik: eigene Darstellung</a:t>
@@ -6982,13 +6517,13 @@
         <p:spPr>
           <a:xfrm>
             <a:off x="0" y="0"/>
-            <a:ext cx="12191695" cy="100584"/>
+            <a:ext cx="12191695" cy="109728"/>
           </a:xfrm>
           <a:prstGeom prst="rect">
             <a:avLst/>
           </a:prstGeom>
           <a:solidFill>
-            <a:srgbClr val="4472C4"/>
+            <a:srgbClr val="305396"/>
           </a:solidFill>
           <a:ln>
             <a:noFill/>
@@ -7025,7 +6560,7 @@
         <p:spPr>
           <a:xfrm>
             <a:off x="594360" y="320040"/>
-            <a:ext cx="10972800" cy="502920"/>
+            <a:ext cx="10972800" cy="548640"/>
           </a:xfrm>
           <a:prstGeom prst="rect">
             <a:avLst/>
@@ -7041,10 +6576,10 @@
             <a:r>
               <a:rPr sz="2600" b="1">
                 <a:solidFill>
-                  <a:srgbClr val="1F374E"/>
+                  <a:srgbClr val="202C3C"/>
                 </a:solidFill>
               </a:rPr>
-              <a:t>Prüfe deinen Code</a:t>
+              <a:t>Code-Check</a:t>
             </a:r>
           </a:p>
         </p:txBody>
@@ -7058,7 +6593,7 @@
         <p:spPr>
           <a:xfrm>
             <a:off x="685800" y="1234440"/>
-            <a:ext cx="5303520" cy="4937760"/>
+            <a:ext cx="5394960" cy="5029200"/>
           </a:xfrm>
           <a:prstGeom prst="rect">
             <a:avLst/>
@@ -7073,91 +6608,76 @@
           <a:p>
             <a:pPr>
               <a:spcAft>
-                <a:spcPts val="800"/>
+                <a:spcPts val="700"/>
               </a:spcAft>
               <a:defRPr sz="1900">
                 <a:solidFill>
-                  <a:srgbClr val="232323"/>
+                  <a:srgbClr val="1E1E1E"/>
                 </a:solidFill>
               </a:defRPr>
             </a:pPr>
             <a:r>
-              <a:t>Habe ich eine Wiederholung verwendet?</a:t>
+              <a:t>Habe ich eine Wiederholung?</a:t>
             </a:r>
           </a:p>
           <a:p>
             <a:pPr>
               <a:spcAft>
-                <a:spcPts val="800"/>
+                <a:spcPts val="700"/>
               </a:spcAft>
               <a:defRPr sz="1900">
                 <a:solidFill>
-                  <a:srgbClr val="232323"/>
+                  <a:srgbClr val="1E1E1E"/>
                 </a:solidFill>
               </a:defRPr>
             </a:pPr>
             <a:r>
-              <a:t>Habe ich eine verschachtelte Wiederholung verwendet?</a:t>
+              <a:t>Habe ich Verschachtelung?</a:t>
             </a:r>
           </a:p>
           <a:p>
             <a:pPr>
               <a:spcAft>
-                <a:spcPts val="800"/>
+                <a:spcPts val="700"/>
               </a:spcAft>
               <a:defRPr sz="1900">
                 <a:solidFill>
-                  <a:srgbClr val="232323"/>
+                  <a:srgbClr val="1E1E1E"/>
                 </a:solidFill>
               </a:defRPr>
             </a:pPr>
             <a:r>
-              <a:t>Habe ich eine eigene Anweisung definiert und mehrfach aufgerufen?</a:t>
+              <a:t>Habe ich eine eigene Anweisung?</a:t>
             </a:r>
           </a:p>
           <a:p>
             <a:pPr>
               <a:spcAft>
-                <a:spcPts val="800"/>
+                <a:spcPts val="700"/>
               </a:spcAft>
               <a:defRPr sz="1900">
                 <a:solidFill>
-                  <a:srgbClr val="232323"/>
+                  <a:srgbClr val="1E1E1E"/>
                 </a:solidFill>
               </a:defRPr>
             </a:pPr>
             <a:r>
-              <a:t>Ist mein Code sinnvoll eingerückt?</a:t>
+              <a:t>Wird sie mehrfach aufgerufen?</a:t>
             </a:r>
           </a:p>
           <a:p>
             <a:pPr>
               <a:spcAft>
-                <a:spcPts val="800"/>
+                <a:spcPts val="700"/>
               </a:spcAft>
               <a:defRPr sz="1900">
                 <a:solidFill>
-                  <a:srgbClr val="232323"/>
+                  <a:srgbClr val="1E1E1E"/>
                 </a:solidFill>
               </a:defRPr>
             </a:pPr>
             <a:r>
-              <a:t>Habe ich unnötig kopierten Code vermieden?</a:t>
-            </a:r>
-          </a:p>
-          <a:p>
-            <a:pPr>
-              <a:spcAft>
-                <a:spcPts val="800"/>
-              </a:spcAft>
-              <a:defRPr sz="1900">
-                <a:solidFill>
-                  <a:srgbClr val="232323"/>
-                </a:solidFill>
-              </a:defRPr>
-            </a:pPr>
-            <a:r>
-              <a:t>Erzeugt mein Programm genau das Zielmuster?</a:t>
+              <a:t>Erzeugt mein Code genau das Muster?</a:t>
             </a:r>
           </a:p>
         </p:txBody>
@@ -7170,18 +6690,18 @@
         </p:nvSpPr>
         <p:spPr>
           <a:xfrm>
-            <a:off x="8001000" y="1051560"/>
-            <a:ext cx="1463040" cy="548640"/>
+            <a:off x="6766560" y="1463040"/>
+            <a:ext cx="1920240" cy="685800"/>
           </a:xfrm>
           <a:prstGeom prst="roundRect">
             <a:avLst/>
           </a:prstGeom>
           <a:solidFill>
-            <a:srgbClr val="FFE699"/>
+            <a:srgbClr val="FFE899"/>
           </a:solidFill>
           <a:ln>
             <a:solidFill>
-              <a:srgbClr val="4472C4"/>
+              <a:srgbClr val="305396"/>
             </a:solidFill>
           </a:ln>
         </p:spPr>
@@ -7205,9 +6725,9 @@
           <a:p>
             <a:pPr algn="ctr"/>
             <a:r>
-              <a:rPr sz="1200" b="1">
+              <a:rPr sz="1300" b="1">
                 <a:solidFill>
-                  <a:srgbClr val="1F374E"/>
+                  <a:srgbClr val="202C3C"/>
                 </a:solidFill>
               </a:rPr>
               <a:t>Beobachten</a:t>
@@ -7223,18 +6743,18 @@
         </p:nvSpPr>
         <p:spPr>
           <a:xfrm>
-            <a:off x="9326880" y="2560320"/>
-            <a:ext cx="1463040" cy="548640"/>
+            <a:off x="9326880" y="1463040"/>
+            <a:ext cx="1920240" cy="685800"/>
           </a:xfrm>
           <a:prstGeom prst="roundRect">
             <a:avLst/>
           </a:prstGeom>
           <a:solidFill>
-            <a:srgbClr val="F2F6FA"/>
+            <a:srgbClr val="E5ECF6"/>
           </a:solidFill>
           <a:ln>
             <a:solidFill>
-              <a:srgbClr val="4472C4"/>
+              <a:srgbClr val="305396"/>
             </a:solidFill>
           </a:ln>
         </p:spPr>
@@ -7258,9 +6778,9 @@
           <a:p>
             <a:pPr algn="ctr"/>
             <a:r>
-              <a:rPr sz="1200" b="1">
+              <a:rPr sz="1300" b="1">
                 <a:solidFill>
-                  <a:srgbClr val="1F374E"/>
+                  <a:srgbClr val="202C3C"/>
                 </a:solidFill>
               </a:rPr>
               <a:t>Eingrenzen</a:t>
@@ -7276,18 +6796,18 @@
         </p:nvSpPr>
         <p:spPr>
           <a:xfrm>
-            <a:off x="8001000" y="4069080"/>
-            <a:ext cx="1463040" cy="548640"/>
+            <a:off x="6766560" y="3383280"/>
+            <a:ext cx="1920240" cy="685800"/>
           </a:xfrm>
           <a:prstGeom prst="roundRect">
             <a:avLst/>
           </a:prstGeom>
           <a:solidFill>
-            <a:srgbClr val="FFE699"/>
+            <a:srgbClr val="FFE899"/>
           </a:solidFill>
           <a:ln>
             <a:solidFill>
-              <a:srgbClr val="4472C4"/>
+              <a:srgbClr val="305396"/>
             </a:solidFill>
           </a:ln>
         </p:spPr>
@@ -7311,9 +6831,9 @@
           <a:p>
             <a:pPr algn="ctr"/>
             <a:r>
-              <a:rPr sz="1200" b="1">
+              <a:rPr sz="1300" b="1">
                 <a:solidFill>
-                  <a:srgbClr val="1F374E"/>
+                  <a:srgbClr val="202C3C"/>
                 </a:solidFill>
               </a:rPr>
               <a:t>Ändern</a:t>
@@ -7329,18 +6849,18 @@
         </p:nvSpPr>
         <p:spPr>
           <a:xfrm>
-            <a:off x="6583680" y="2560320"/>
-            <a:ext cx="1463040" cy="548640"/>
+            <a:off x="9326880" y="3383280"/>
+            <a:ext cx="1920240" cy="685800"/>
           </a:xfrm>
           <a:prstGeom prst="roundRect">
             <a:avLst/>
           </a:prstGeom>
           <a:solidFill>
-            <a:srgbClr val="F2F6FA"/>
+            <a:srgbClr val="E5ECF6"/>
           </a:solidFill>
           <a:ln>
             <a:solidFill>
-              <a:srgbClr val="4472C4"/>
+              <a:srgbClr val="305396"/>
             </a:solidFill>
           </a:ln>
         </p:spPr>
@@ -7364,9 +6884,9 @@
           <a:p>
             <a:pPr algn="ctr"/>
             <a:r>
-              <a:rPr sz="1200" b="1">
+              <a:rPr sz="1300" b="1">
                 <a:solidFill>
-                  <a:srgbClr val="1F374E"/>
+                  <a:srgbClr val="202C3C"/>
                 </a:solidFill>
               </a:rPr>
               <a:t>Testen</a:t>
@@ -7382,18 +6902,18 @@
         </p:nvSpPr>
         <p:spPr>
           <a:xfrm>
-            <a:off x="7909560" y="2514600"/>
-            <a:ext cx="1645920" cy="640080"/>
+            <a:off x="7955279" y="2743200"/>
+            <a:ext cx="2011680" cy="594360"/>
           </a:xfrm>
           <a:prstGeom prst="roundRect">
             <a:avLst/>
           </a:prstGeom>
           <a:solidFill>
-            <a:srgbClr val="E2EFDA"/>
+            <a:srgbClr val="DDEEDD"/>
           </a:solidFill>
           <a:ln>
             <a:solidFill>
-              <a:srgbClr val="4472C4"/>
+              <a:srgbClr val="305396"/>
             </a:solidFill>
           </a:ln>
         </p:spPr>
@@ -7419,11 +6939,10 @@
             <a:r>
               <a:rPr sz="1300" b="1">
                 <a:solidFill>
-                  <a:srgbClr val="1F374E"/>
+                  <a:srgbClr val="202C3C"/>
                 </a:solidFill>
               </a:rPr>
-              <a:t>Programm
-verbessern</a:t>
+              <a:t>Debugging-Zyklus</a:t>
             </a:r>
           </a:p>
         </p:txBody>
@@ -7436,8 +6955,8 @@
         </p:nvSpPr>
         <p:spPr>
           <a:xfrm>
-            <a:off x="502920" y="6510528"/>
-            <a:ext cx="11064240" cy="182880"/>
+            <a:off x="365760" y="6510528"/>
+            <a:ext cx="11430000" cy="228600"/>
           </a:xfrm>
           <a:prstGeom prst="rect">
             <a:avLst/>
@@ -7454,7 +6973,7 @@
             <a:r>
               <a:rPr sz="800">
                 <a:solidFill>
-                  <a:srgbClr val="646464"/>
+                  <a:srgbClr val="6E6E6E"/>
                 </a:solidFill>
               </a:rPr>
               <a:t>Grafik: eigene Darstellung</a:t>
@@ -7489,13 +7008,13 @@
         <p:spPr>
           <a:xfrm>
             <a:off x="0" y="0"/>
-            <a:ext cx="12191695" cy="100584"/>
+            <a:ext cx="12191695" cy="109728"/>
           </a:xfrm>
           <a:prstGeom prst="rect">
             <a:avLst/>
           </a:prstGeom>
           <a:solidFill>
-            <a:srgbClr val="4472C4"/>
+            <a:srgbClr val="305396"/>
           </a:solidFill>
           <a:ln>
             <a:noFill/>
@@ -7532,7 +7051,7 @@
         <p:spPr>
           <a:xfrm>
             <a:off x="594360" y="320040"/>
-            <a:ext cx="10972800" cy="502920"/>
+            <a:ext cx="10972800" cy="548640"/>
           </a:xfrm>
           <a:prstGeom prst="rect">
             <a:avLst/>
@@ -7548,10 +7067,10 @@
             <a:r>
               <a:rPr sz="2600" b="1">
                 <a:solidFill>
-                  <a:srgbClr val="1F374E"/>
+                  <a:srgbClr val="202C3C"/>
                 </a:solidFill>
               </a:rPr>
-              <a:t>Konkrete Testfragen</a:t>
+              <a:t>Zielbild vergleichen</a:t>
             </a:r>
           </a:p>
         </p:txBody>
@@ -7565,7 +7084,7 @@
         <p:spPr>
           <a:xfrm>
             <a:off x="685800" y="1234440"/>
-            <a:ext cx="5303520" cy="4937760"/>
+            <a:ext cx="5394960" cy="5029200"/>
           </a:xfrm>
           <a:prstGeom prst="rect">
             <a:avLst/>
@@ -7580,61 +7099,61 @@
           <a:p>
             <a:pPr>
               <a:spcAft>
-                <a:spcPts val="800"/>
+                <a:spcPts val="700"/>
               </a:spcAft>
               <a:defRPr sz="1900">
                 <a:solidFill>
-                  <a:srgbClr val="232323"/>
+                  <a:srgbClr val="1E1E1E"/>
                 </a:solidFill>
               </a:defRPr>
             </a:pPr>
             <a:r>
-              <a:t>Werden genau 16 Ziegel gelegt?</a:t>
+              <a:t>werden genau 16 Ziegel gelegt?</a:t>
             </a:r>
           </a:p>
           <a:p>
             <a:pPr>
               <a:spcAft>
-                <a:spcPts val="800"/>
+                <a:spcPts val="700"/>
               </a:spcAft>
               <a:defRPr sz="1900">
                 <a:solidFill>
-                  <a:srgbClr val="232323"/>
+                  <a:srgbClr val="1E1E1E"/>
                 </a:solidFill>
               </a:defRPr>
             </a:pPr>
             <a:r>
-              <a:t>Stimmt die Position nach der ersten Reihe?</a:t>
+              <a:t>stimmt der Reihenwechsel?</a:t>
             </a:r>
           </a:p>
           <a:p>
             <a:pPr>
               <a:spcAft>
-                <a:spcPts val="800"/>
+                <a:spcPts val="700"/>
               </a:spcAft>
               <a:defRPr sz="1900">
                 <a:solidFill>
-                  <a:srgbClr val="232323"/>
+                  <a:srgbClr val="1E1E1E"/>
                 </a:solidFill>
               </a:defRPr>
             </a:pPr>
             <a:r>
-              <a:t>Funktioniert der Reihenwechsel in die richtige Richtung?</a:t>
+              <a:t>endet Karol an der erwarteten Stelle?</a:t>
             </a:r>
           </a:p>
           <a:p>
             <a:pPr>
               <a:spcAft>
-                <a:spcPts val="800"/>
+                <a:spcPts val="700"/>
               </a:spcAft>
               <a:defRPr sz="1900">
                 <a:solidFill>
-                  <a:srgbClr val="232323"/>
+                  <a:srgbClr val="1E1E1E"/>
                 </a:solidFill>
               </a:defRPr>
             </a:pPr>
             <a:r>
-              <a:t>Endet Karol nach der vierten Reihe an der erwarteten Stelle?</a:t>
+              <a:t>ist der Code erklärbar?</a:t>
             </a:r>
           </a:p>
         </p:txBody>
@@ -7647,8 +7166,8 @@
         </p:nvSpPr>
         <p:spPr>
           <a:xfrm>
-            <a:off x="6629400" y="1325880"/>
-            <a:ext cx="603504" cy="603504"/>
+            <a:off x="6858000" y="1463040"/>
+            <a:ext cx="530352" cy="530352"/>
           </a:xfrm>
           <a:prstGeom prst="rect">
             <a:avLst/>
@@ -7658,7 +7177,7 @@
           </a:solidFill>
           <a:ln>
             <a:solidFill>
-              <a:srgbClr val="646464"/>
+              <a:srgbClr val="6E6E6E"/>
             </a:solidFill>
           </a:ln>
         </p:spPr>
@@ -7681,9 +7200,6 @@
           <a:lstStyle/>
           <a:p>
             <a:pPr algn="ctr"/>
-            <a:r>
-              <a:t>■</a:t>
-            </a:r>
           </a:p>
         </p:txBody>
       </p:sp>
@@ -7695,8 +7211,8 @@
         </p:nvSpPr>
         <p:spPr>
           <a:xfrm>
-            <a:off x="7269480" y="1325880"/>
-            <a:ext cx="603504" cy="603504"/>
+            <a:off x="7424927" y="1463040"/>
+            <a:ext cx="530352" cy="530352"/>
           </a:xfrm>
           <a:prstGeom prst="rect">
             <a:avLst/>
@@ -7706,7 +7222,7 @@
           </a:solidFill>
           <a:ln>
             <a:solidFill>
-              <a:srgbClr val="646464"/>
+              <a:srgbClr val="6E6E6E"/>
             </a:solidFill>
           </a:ln>
         </p:spPr>
@@ -7729,9 +7245,6 @@
           <a:lstStyle/>
           <a:p>
             <a:pPr algn="ctr"/>
-            <a:r>
-              <a:t>■</a:t>
-            </a:r>
           </a:p>
         </p:txBody>
       </p:sp>
@@ -7743,8 +7256,8 @@
         </p:nvSpPr>
         <p:spPr>
           <a:xfrm>
-            <a:off x="7909560" y="1325880"/>
-            <a:ext cx="603504" cy="603504"/>
+            <a:off x="7991856" y="1463040"/>
+            <a:ext cx="530352" cy="530352"/>
           </a:xfrm>
           <a:prstGeom prst="rect">
             <a:avLst/>
@@ -7754,7 +7267,7 @@
           </a:solidFill>
           <a:ln>
             <a:solidFill>
-              <a:srgbClr val="646464"/>
+              <a:srgbClr val="6E6E6E"/>
             </a:solidFill>
           </a:ln>
         </p:spPr>
@@ -7777,9 +7290,6 @@
           <a:lstStyle/>
           <a:p>
             <a:pPr algn="ctr"/>
-            <a:r>
-              <a:t>■</a:t>
-            </a:r>
           </a:p>
         </p:txBody>
       </p:sp>
@@ -7791,8 +7301,8 @@
         </p:nvSpPr>
         <p:spPr>
           <a:xfrm>
-            <a:off x="8549640" y="1325880"/>
-            <a:ext cx="603504" cy="603504"/>
+            <a:off x="8558784" y="1463040"/>
+            <a:ext cx="530352" cy="530352"/>
           </a:xfrm>
           <a:prstGeom prst="rect">
             <a:avLst/>
@@ -7802,7 +7312,7 @@
           </a:solidFill>
           <a:ln>
             <a:solidFill>
-              <a:srgbClr val="646464"/>
+              <a:srgbClr val="6E6E6E"/>
             </a:solidFill>
           </a:ln>
         </p:spPr>
@@ -7825,9 +7335,6 @@
           <a:lstStyle/>
           <a:p>
             <a:pPr algn="ctr"/>
-            <a:r>
-              <a:t>■</a:t>
-            </a:r>
           </a:p>
         </p:txBody>
       </p:sp>
@@ -7839,8 +7346,8 @@
         </p:nvSpPr>
         <p:spPr>
           <a:xfrm>
-            <a:off x="6629400" y="1965960"/>
-            <a:ext cx="603504" cy="603504"/>
+            <a:off x="6858000" y="2029968"/>
+            <a:ext cx="530352" cy="530352"/>
           </a:xfrm>
           <a:prstGeom prst="rect">
             <a:avLst/>
@@ -7850,7 +7357,7 @@
           </a:solidFill>
           <a:ln>
             <a:solidFill>
-              <a:srgbClr val="646464"/>
+              <a:srgbClr val="6E6E6E"/>
             </a:solidFill>
           </a:ln>
         </p:spPr>
@@ -7873,9 +7380,6 @@
           <a:lstStyle/>
           <a:p>
             <a:pPr algn="ctr"/>
-            <a:r>
-              <a:t>■</a:t>
-            </a:r>
           </a:p>
         </p:txBody>
       </p:sp>
@@ -7887,8 +7391,8 @@
         </p:nvSpPr>
         <p:spPr>
           <a:xfrm>
-            <a:off x="7269480" y="1965960"/>
-            <a:ext cx="603504" cy="603504"/>
+            <a:off x="7424927" y="2029968"/>
+            <a:ext cx="530352" cy="530352"/>
           </a:xfrm>
           <a:prstGeom prst="rect">
             <a:avLst/>
@@ -7898,7 +7402,7 @@
           </a:solidFill>
           <a:ln>
             <a:solidFill>
-              <a:srgbClr val="646464"/>
+              <a:srgbClr val="6E6E6E"/>
             </a:solidFill>
           </a:ln>
         </p:spPr>
@@ -7921,9 +7425,6 @@
           <a:lstStyle/>
           <a:p>
             <a:pPr algn="ctr"/>
-            <a:r>
-              <a:t>■</a:t>
-            </a:r>
           </a:p>
         </p:txBody>
       </p:sp>
@@ -7935,8 +7436,8 @@
         </p:nvSpPr>
         <p:spPr>
           <a:xfrm>
-            <a:off x="7909560" y="1965960"/>
-            <a:ext cx="603504" cy="603504"/>
+            <a:off x="7991856" y="2029968"/>
+            <a:ext cx="530352" cy="530352"/>
           </a:xfrm>
           <a:prstGeom prst="rect">
             <a:avLst/>
@@ -7946,7 +7447,7 @@
           </a:solidFill>
           <a:ln>
             <a:solidFill>
-              <a:srgbClr val="646464"/>
+              <a:srgbClr val="6E6E6E"/>
             </a:solidFill>
           </a:ln>
         </p:spPr>
@@ -7969,9 +7470,6 @@
           <a:lstStyle/>
           <a:p>
             <a:pPr algn="ctr"/>
-            <a:r>
-              <a:t>■</a:t>
-            </a:r>
           </a:p>
         </p:txBody>
       </p:sp>
@@ -7983,8 +7481,8 @@
         </p:nvSpPr>
         <p:spPr>
           <a:xfrm>
-            <a:off x="8549640" y="1965960"/>
-            <a:ext cx="603504" cy="603504"/>
+            <a:off x="8558784" y="2029968"/>
+            <a:ext cx="530352" cy="530352"/>
           </a:xfrm>
           <a:prstGeom prst="rect">
             <a:avLst/>
@@ -7994,7 +7492,7 @@
           </a:solidFill>
           <a:ln>
             <a:solidFill>
-              <a:srgbClr val="646464"/>
+              <a:srgbClr val="6E6E6E"/>
             </a:solidFill>
           </a:ln>
         </p:spPr>
@@ -8017,9 +7515,6 @@
           <a:lstStyle/>
           <a:p>
             <a:pPr algn="ctr"/>
-            <a:r>
-              <a:t>■</a:t>
-            </a:r>
           </a:p>
         </p:txBody>
       </p:sp>
@@ -8031,8 +7526,8 @@
         </p:nvSpPr>
         <p:spPr>
           <a:xfrm>
-            <a:off x="6629400" y="2606039"/>
-            <a:ext cx="603504" cy="603504"/>
+            <a:off x="6858000" y="2596896"/>
+            <a:ext cx="530352" cy="530352"/>
           </a:xfrm>
           <a:prstGeom prst="rect">
             <a:avLst/>
@@ -8042,7 +7537,7 @@
           </a:solidFill>
           <a:ln>
             <a:solidFill>
-              <a:srgbClr val="646464"/>
+              <a:srgbClr val="6E6E6E"/>
             </a:solidFill>
           </a:ln>
         </p:spPr>
@@ -8065,9 +7560,6 @@
           <a:lstStyle/>
           <a:p>
             <a:pPr algn="ctr"/>
-            <a:r>
-              <a:t>■</a:t>
-            </a:r>
           </a:p>
         </p:txBody>
       </p:sp>
@@ -8079,8 +7571,8 @@
         </p:nvSpPr>
         <p:spPr>
           <a:xfrm>
-            <a:off x="7269480" y="2606039"/>
-            <a:ext cx="603504" cy="603504"/>
+            <a:off x="7424927" y="2596896"/>
+            <a:ext cx="530352" cy="530352"/>
           </a:xfrm>
           <a:prstGeom prst="rect">
             <a:avLst/>
@@ -8090,7 +7582,7 @@
           </a:solidFill>
           <a:ln>
             <a:solidFill>
-              <a:srgbClr val="646464"/>
+              <a:srgbClr val="6E6E6E"/>
             </a:solidFill>
           </a:ln>
         </p:spPr>
@@ -8113,9 +7605,6 @@
           <a:lstStyle/>
           <a:p>
             <a:pPr algn="ctr"/>
-            <a:r>
-              <a:t>■</a:t>
-            </a:r>
           </a:p>
         </p:txBody>
       </p:sp>
@@ -8127,8 +7616,8 @@
         </p:nvSpPr>
         <p:spPr>
           <a:xfrm>
-            <a:off x="7909560" y="2606039"/>
-            <a:ext cx="603504" cy="603504"/>
+            <a:off x="7991856" y="2596896"/>
+            <a:ext cx="530352" cy="530352"/>
           </a:xfrm>
           <a:prstGeom prst="rect">
             <a:avLst/>
@@ -8138,7 +7627,7 @@
           </a:solidFill>
           <a:ln>
             <a:solidFill>
-              <a:srgbClr val="646464"/>
+              <a:srgbClr val="6E6E6E"/>
             </a:solidFill>
           </a:ln>
         </p:spPr>
@@ -8161,9 +7650,6 @@
           <a:lstStyle/>
           <a:p>
             <a:pPr algn="ctr"/>
-            <a:r>
-              <a:t>■</a:t>
-            </a:r>
           </a:p>
         </p:txBody>
       </p:sp>
@@ -8175,8 +7661,8 @@
         </p:nvSpPr>
         <p:spPr>
           <a:xfrm>
-            <a:off x="8549640" y="2606039"/>
-            <a:ext cx="603504" cy="603504"/>
+            <a:off x="8558784" y="2596896"/>
+            <a:ext cx="530352" cy="530352"/>
           </a:xfrm>
           <a:prstGeom prst="rect">
             <a:avLst/>
@@ -8186,7 +7672,7 @@
           </a:solidFill>
           <a:ln>
             <a:solidFill>
-              <a:srgbClr val="646464"/>
+              <a:srgbClr val="6E6E6E"/>
             </a:solidFill>
           </a:ln>
         </p:spPr>
@@ -8209,9 +7695,6 @@
           <a:lstStyle/>
           <a:p>
             <a:pPr algn="ctr"/>
-            <a:r>
-              <a:t>■</a:t>
-            </a:r>
           </a:p>
         </p:txBody>
       </p:sp>
@@ -8223,8 +7706,8 @@
         </p:nvSpPr>
         <p:spPr>
           <a:xfrm>
-            <a:off x="6629400" y="3246120"/>
-            <a:ext cx="603504" cy="603504"/>
+            <a:off x="6858000" y="3163824"/>
+            <a:ext cx="530352" cy="530352"/>
           </a:xfrm>
           <a:prstGeom prst="rect">
             <a:avLst/>
@@ -8234,7 +7717,7 @@
           </a:solidFill>
           <a:ln>
             <a:solidFill>
-              <a:srgbClr val="646464"/>
+              <a:srgbClr val="6E6E6E"/>
             </a:solidFill>
           </a:ln>
         </p:spPr>
@@ -8257,9 +7740,6 @@
           <a:lstStyle/>
           <a:p>
             <a:pPr algn="ctr"/>
-            <a:r>
-              <a:t>■</a:t>
-            </a:r>
           </a:p>
         </p:txBody>
       </p:sp>
@@ -8271,8 +7751,8 @@
         </p:nvSpPr>
         <p:spPr>
           <a:xfrm>
-            <a:off x="7269480" y="3246120"/>
-            <a:ext cx="603504" cy="603504"/>
+            <a:off x="7424927" y="3163824"/>
+            <a:ext cx="530352" cy="530352"/>
           </a:xfrm>
           <a:prstGeom prst="rect">
             <a:avLst/>
@@ -8282,7 +7762,7 @@
           </a:solidFill>
           <a:ln>
             <a:solidFill>
-              <a:srgbClr val="646464"/>
+              <a:srgbClr val="6E6E6E"/>
             </a:solidFill>
           </a:ln>
         </p:spPr>
@@ -8305,9 +7785,6 @@
           <a:lstStyle/>
           <a:p>
             <a:pPr algn="ctr"/>
-            <a:r>
-              <a:t>■</a:t>
-            </a:r>
           </a:p>
         </p:txBody>
       </p:sp>
@@ -8319,8 +7796,8 @@
         </p:nvSpPr>
         <p:spPr>
           <a:xfrm>
-            <a:off x="7909560" y="3246120"/>
-            <a:ext cx="603504" cy="603504"/>
+            <a:off x="7991856" y="3163824"/>
+            <a:ext cx="530352" cy="530352"/>
           </a:xfrm>
           <a:prstGeom prst="rect">
             <a:avLst/>
@@ -8330,7 +7807,7 @@
           </a:solidFill>
           <a:ln>
             <a:solidFill>
-              <a:srgbClr val="646464"/>
+              <a:srgbClr val="6E6E6E"/>
             </a:solidFill>
           </a:ln>
         </p:spPr>
@@ -8353,9 +7830,6 @@
           <a:lstStyle/>
           <a:p>
             <a:pPr algn="ctr"/>
-            <a:r>
-              <a:t>■</a:t>
-            </a:r>
           </a:p>
         </p:txBody>
       </p:sp>
@@ -8367,8 +7841,8 @@
         </p:nvSpPr>
         <p:spPr>
           <a:xfrm>
-            <a:off x="8549640" y="3246120"/>
-            <a:ext cx="603504" cy="603504"/>
+            <a:off x="8558784" y="3163824"/>
+            <a:ext cx="530352" cy="530352"/>
           </a:xfrm>
           <a:prstGeom prst="rect">
             <a:avLst/>
@@ -8378,7 +7852,7 @@
           </a:solidFill>
           <a:ln>
             <a:solidFill>
-              <a:srgbClr val="646464"/>
+              <a:srgbClr val="6E6E6E"/>
             </a:solidFill>
           </a:ln>
         </p:spPr>
@@ -8401,9 +7875,6 @@
           <a:lstStyle/>
           <a:p>
             <a:pPr algn="ctr"/>
-            <a:r>
-              <a:t>■</a:t>
-            </a:r>
           </a:p>
         </p:txBody>
       </p:sp>
@@ -8415,18 +7886,18 @@
         </p:nvSpPr>
         <p:spPr>
           <a:xfrm>
-            <a:off x="5623560" y="1920240"/>
-            <a:ext cx="731520" cy="731520"/>
+            <a:off x="5943600" y="1965960"/>
+            <a:ext cx="658368" cy="658368"/>
           </a:xfrm>
           <a:prstGeom prst="roundRect">
             <a:avLst/>
           </a:prstGeom>
           <a:solidFill>
-            <a:srgbClr val="FFE699"/>
+            <a:srgbClr val="FFE899"/>
           </a:solidFill>
           <a:ln>
             <a:solidFill>
-              <a:srgbClr val="4472C4"/>
+              <a:srgbClr val="305396"/>
             </a:solidFill>
           </a:ln>
         </p:spPr>
@@ -8450,9 +7921,9 @@
           <a:p>
             <a:pPr algn="ctr"/>
             <a:r>
-              <a:rPr sz="1800" b="1">
+              <a:rPr sz="1700" b="1">
                 <a:solidFill>
-                  <a:srgbClr val="1F374E"/>
+                  <a:srgbClr val="202C3C"/>
                 </a:solidFill>
               </a:rPr>
               <a:t>K</a:t>
@@ -8468,8 +7939,8 @@
         </p:nvSpPr>
         <p:spPr>
           <a:xfrm>
-            <a:off x="502920" y="6510528"/>
-            <a:ext cx="11064240" cy="182880"/>
+            <a:off x="365760" y="6510528"/>
+            <a:ext cx="11430000" cy="228600"/>
           </a:xfrm>
           <a:prstGeom prst="rect">
             <a:avLst/>
@@ -8486,7 +7957,7 @@
             <a:r>
               <a:rPr sz="800">
                 <a:solidFill>
-                  <a:srgbClr val="646464"/>
+                  <a:srgbClr val="6E6E6E"/>
                 </a:solidFill>
               </a:rPr>
               <a:t>Grafik: eigene Darstellung</a:t>
@@ -8521,13 +7992,13 @@
         <p:spPr>
           <a:xfrm>
             <a:off x="0" y="0"/>
-            <a:ext cx="12191695" cy="100584"/>
+            <a:ext cx="12191695" cy="109728"/>
           </a:xfrm>
           <a:prstGeom prst="rect">
             <a:avLst/>
           </a:prstGeom>
           <a:solidFill>
-            <a:srgbClr val="4472C4"/>
+            <a:srgbClr val="305396"/>
           </a:solidFill>
           <a:ln>
             <a:noFill/>
@@ -8564,7 +8035,7 @@
         <p:spPr>
           <a:xfrm>
             <a:off x="594360" y="320040"/>
-            <a:ext cx="10972800" cy="502920"/>
+            <a:ext cx="10972800" cy="548640"/>
           </a:xfrm>
           <a:prstGeom prst="rect">
             <a:avLst/>
@@ -8580,10 +8051,10 @@
             <a:r>
               <a:rPr sz="2600" b="1">
                 <a:solidFill>
-                  <a:srgbClr val="1F374E"/>
+                  <a:srgbClr val="202C3C"/>
                 </a:solidFill>
               </a:rPr>
-              <a:t>So soll das Ergebnis aussehen</a:t>
+              <a:t>Mögliche Lösung als Struktogramm</a:t>
             </a:r>
           </a:p>
         </p:txBody>
@@ -8597,7 +8068,7 @@
         <p:spPr>
           <a:xfrm>
             <a:off x="685800" y="1234440"/>
-            <a:ext cx="5303520" cy="4937760"/>
+            <a:ext cx="5394960" cy="5029200"/>
           </a:xfrm>
           <a:prstGeom prst="rect">
             <a:avLst/>
@@ -8612,55 +8083,85 @@
           <a:p>
             <a:pPr>
               <a:spcAft>
-                <a:spcPts val="800"/>
+                <a:spcPts val="700"/>
               </a:spcAft>
               <a:defRPr sz="1900">
                 <a:solidFill>
-                  <a:srgbClr val="232323"/>
+                  <a:srgbClr val="1E1E1E"/>
                 </a:solidFill>
               </a:defRPr>
             </a:pPr>
             <a:r>
-              <a:t>Vergleiche deine Welt mit dem Zielbild.</a:t>
+              <a:t>äußere Schleife erzeugt Reihen</a:t>
             </a:r>
           </a:p>
           <a:p>
             <a:pPr>
               <a:spcAft>
-                <a:spcPts val="800"/>
+                <a:spcPts val="700"/>
               </a:spcAft>
               <a:defRPr sz="1900">
                 <a:solidFill>
-                  <a:srgbClr val="232323"/>
+                  <a:srgbClr val="1E1E1E"/>
                 </a:solidFill>
               </a:defRPr>
             </a:pPr>
             <a:r>
-              <a:t>Das Zielbild ist entscheidend – nicht ein bestimmter Lösungsweg.</a:t>
-            </a:r>
-          </a:p>
-        </p:txBody>
-      </p:sp>
-      <p:sp>
-        <p:nvSpPr>
-          <p:cNvPr id="5" name="Rectangle 4"/>
+              <a:t>innere Schleife erzeugt Ziegel einer Reihe</a:t>
+            </a:r>
+          </a:p>
+          <a:p>
+            <a:pPr>
+              <a:spcAft>
+                <a:spcPts val="700"/>
+              </a:spcAft>
+              <a:defRPr sz="1900">
+                <a:solidFill>
+                  <a:srgbClr val="1E1E1E"/>
+                </a:solidFill>
+              </a:defRPr>
+            </a:pPr>
+            <a:r>
+              <a:t>Reihenwechsel verbindet die Reihen</a:t>
+            </a:r>
+          </a:p>
+          <a:p>
+            <a:pPr>
+              <a:spcAft>
+                <a:spcPts val="700"/>
+              </a:spcAft>
+              <a:defRPr sz="1900">
+                <a:solidFill>
+                  <a:srgbClr val="1E1E1E"/>
+                </a:solidFill>
+              </a:defRPr>
+            </a:pPr>
+            <a:r>
+              <a:t>verschiedene korrekte Codes sind möglich.</a:t>
+            </a:r>
+          </a:p>
+        </p:txBody>
+      </p:sp>
+      <p:sp>
+        <p:nvSpPr>
+          <p:cNvPr id="5" name="Rounded Rectangle 4"/>
           <p:cNvSpPr/>
           <p:nvPr/>
         </p:nvSpPr>
         <p:spPr>
           <a:xfrm>
-            <a:off x="6629400" y="1325880"/>
-            <a:ext cx="603504" cy="603504"/>
-          </a:xfrm>
-          <a:prstGeom prst="rect">
-            <a:avLst/>
-          </a:prstGeom>
-          <a:solidFill>
-            <a:srgbClr val="F8CBAD"/>
+            <a:off x="6309360" y="1280160"/>
+            <a:ext cx="5029200" cy="530352"/>
+          </a:xfrm>
+          <a:prstGeom prst="roundRect">
+            <a:avLst/>
+          </a:prstGeom>
+          <a:solidFill>
+            <a:srgbClr val="E5ECF6"/>
           </a:solidFill>
           <a:ln>
             <a:solidFill>
-              <a:srgbClr val="646464"/>
+              <a:srgbClr val="305396"/>
             </a:solidFill>
           </a:ln>
         </p:spPr>
@@ -8679,36 +8180,41 @@
           </a:fontRef>
         </p:style>
         <p:txBody>
-          <a:bodyPr rtlCol="0" anchor="ctr"/>
+          <a:bodyPr rtlCol="0" anchor="ctr" wrap="square"/>
           <a:lstStyle/>
           <a:p>
             <a:pPr algn="ctr"/>
             <a:r>
-              <a:t>■</a:t>
-            </a:r>
-          </a:p>
-        </p:txBody>
-      </p:sp>
-      <p:sp>
-        <p:nvSpPr>
-          <p:cNvPr id="6" name="Rectangle 5"/>
+              <a:rPr sz="1200" b="1">
+                <a:solidFill>
+                  <a:srgbClr val="202C3C"/>
+                </a:solidFill>
+              </a:rPr>
+              <a:t>4-mal: Reihen</a:t>
+            </a:r>
+          </a:p>
+        </p:txBody>
+      </p:sp>
+      <p:sp>
+        <p:nvSpPr>
+          <p:cNvPr id="6" name="Rounded Rectangle 5"/>
           <p:cNvSpPr/>
           <p:nvPr/>
         </p:nvSpPr>
         <p:spPr>
           <a:xfrm>
-            <a:off x="7269480" y="1325880"/>
-            <a:ext cx="603504" cy="603504"/>
-          </a:xfrm>
-          <a:prstGeom prst="rect">
-            <a:avLst/>
-          </a:prstGeom>
-          <a:solidFill>
-            <a:srgbClr val="F8CBAD"/>
+            <a:off x="6629400" y="1892807"/>
+            <a:ext cx="4389120" cy="530352"/>
+          </a:xfrm>
+          <a:prstGeom prst="roundRect">
+            <a:avLst/>
+          </a:prstGeom>
+          <a:solidFill>
+            <a:srgbClr val="FFE899"/>
           </a:solidFill>
           <a:ln>
             <a:solidFill>
-              <a:srgbClr val="646464"/>
+              <a:srgbClr val="305396"/>
             </a:solidFill>
           </a:ln>
         </p:spPr>
@@ -8727,36 +8233,41 @@
           </a:fontRef>
         </p:style>
         <p:txBody>
-          <a:bodyPr rtlCol="0" anchor="ctr"/>
+          <a:bodyPr rtlCol="0" anchor="ctr" wrap="square"/>
           <a:lstStyle/>
           <a:p>
             <a:pPr algn="ctr"/>
             <a:r>
-              <a:t>■</a:t>
-            </a:r>
-          </a:p>
-        </p:txBody>
-      </p:sp>
-      <p:sp>
-        <p:nvSpPr>
-          <p:cNvPr id="7" name="Rectangle 6"/>
+              <a:rPr sz="1200" b="1">
+                <a:solidFill>
+                  <a:srgbClr val="202C3C"/>
+                </a:solidFill>
+              </a:rPr>
+              <a:t>4-mal: Felder</a:t>
+            </a:r>
+          </a:p>
+        </p:txBody>
+      </p:sp>
+      <p:sp>
+        <p:nvSpPr>
+          <p:cNvPr id="7" name="Rounded Rectangle 6"/>
           <p:cNvSpPr/>
           <p:nvPr/>
         </p:nvSpPr>
         <p:spPr>
           <a:xfrm>
-            <a:off x="7909560" y="1325880"/>
-            <a:ext cx="603504" cy="603504"/>
-          </a:xfrm>
-          <a:prstGeom prst="rect">
-            <a:avLst/>
-          </a:prstGeom>
-          <a:solidFill>
-            <a:srgbClr val="F8CBAD"/>
+            <a:off x="6949440" y="2505456"/>
+            <a:ext cx="3749039" cy="530352"/>
+          </a:xfrm>
+          <a:prstGeom prst="roundRect">
+            <a:avLst/>
+          </a:prstGeom>
+          <a:solidFill>
+            <a:srgbClr val="DDEEDD"/>
           </a:solidFill>
           <a:ln>
             <a:solidFill>
-              <a:srgbClr val="646464"/>
+              <a:srgbClr val="305396"/>
             </a:solidFill>
           </a:ln>
         </p:spPr>
@@ -8775,36 +8286,41 @@
           </a:fontRef>
         </p:style>
         <p:txBody>
-          <a:bodyPr rtlCol="0" anchor="ctr"/>
+          <a:bodyPr rtlCol="0" anchor="ctr" wrap="square"/>
           <a:lstStyle/>
           <a:p>
             <a:pPr algn="ctr"/>
             <a:r>
-              <a:t>■</a:t>
-            </a:r>
-          </a:p>
-        </p:txBody>
-      </p:sp>
-      <p:sp>
-        <p:nvSpPr>
-          <p:cNvPr id="8" name="Rectangle 7"/>
+              <a:rPr sz="1200" b="1">
+                <a:solidFill>
+                  <a:srgbClr val="202C3C"/>
+                </a:solidFill>
+              </a:rPr>
+              <a:t>Ziegel hinlegen</a:t>
+            </a:r>
+          </a:p>
+        </p:txBody>
+      </p:sp>
+      <p:sp>
+        <p:nvSpPr>
+          <p:cNvPr id="8" name="Rounded Rectangle 7"/>
           <p:cNvSpPr/>
           <p:nvPr/>
         </p:nvSpPr>
         <p:spPr>
           <a:xfrm>
-            <a:off x="8549640" y="1325880"/>
-            <a:ext cx="603504" cy="603504"/>
-          </a:xfrm>
-          <a:prstGeom prst="rect">
-            <a:avLst/>
-          </a:prstGeom>
-          <a:solidFill>
-            <a:srgbClr val="F8CBAD"/>
+            <a:off x="6949440" y="3118103"/>
+            <a:ext cx="3749039" cy="530352"/>
+          </a:xfrm>
+          <a:prstGeom prst="roundRect">
+            <a:avLst/>
+          </a:prstGeom>
+          <a:solidFill>
+            <a:srgbClr val="DDEEDD"/>
           </a:solidFill>
           <a:ln>
             <a:solidFill>
-              <a:srgbClr val="646464"/>
+              <a:srgbClr val="305396"/>
             </a:solidFill>
           </a:ln>
         </p:spPr>
@@ -8823,36 +8339,41 @@
           </a:fontRef>
         </p:style>
         <p:txBody>
-          <a:bodyPr rtlCol="0" anchor="ctr"/>
+          <a:bodyPr rtlCol="0" anchor="ctr" wrap="square"/>
           <a:lstStyle/>
           <a:p>
             <a:pPr algn="ctr"/>
             <a:r>
-              <a:t>■</a:t>
-            </a:r>
-          </a:p>
-        </p:txBody>
-      </p:sp>
-      <p:sp>
-        <p:nvSpPr>
-          <p:cNvPr id="9" name="Rectangle 8"/>
+              <a:rPr sz="1200" b="1">
+                <a:solidFill>
+                  <a:srgbClr val="202C3C"/>
+                </a:solidFill>
+              </a:rPr>
+              <a:t>ggf. Schritt</a:t>
+            </a:r>
+          </a:p>
+        </p:txBody>
+      </p:sp>
+      <p:sp>
+        <p:nvSpPr>
+          <p:cNvPr id="9" name="Rounded Rectangle 8"/>
           <p:cNvSpPr/>
           <p:nvPr/>
         </p:nvSpPr>
         <p:spPr>
           <a:xfrm>
-            <a:off x="6629400" y="1965960"/>
-            <a:ext cx="603504" cy="603504"/>
-          </a:xfrm>
-          <a:prstGeom prst="rect">
-            <a:avLst/>
-          </a:prstGeom>
-          <a:solidFill>
-            <a:srgbClr val="F8CBAD"/>
+            <a:off x="6629400" y="3730752"/>
+            <a:ext cx="4389120" cy="530352"/>
+          </a:xfrm>
+          <a:prstGeom prst="roundRect">
+            <a:avLst/>
+          </a:prstGeom>
+          <a:solidFill>
+            <a:srgbClr val="FFE899"/>
           </a:solidFill>
           <a:ln>
             <a:solidFill>
-              <a:srgbClr val="646464"/>
+              <a:srgbClr val="305396"/>
             </a:solidFill>
           </a:ln>
         </p:spPr>
@@ -8871,607 +8392,31 @@
           </a:fontRef>
         </p:style>
         <p:txBody>
-          <a:bodyPr rtlCol="0" anchor="ctr"/>
+          <a:bodyPr rtlCol="0" anchor="ctr" wrap="square"/>
           <a:lstStyle/>
           <a:p>
             <a:pPr algn="ctr"/>
             <a:r>
-              <a:t>■</a:t>
-            </a:r>
-          </a:p>
-        </p:txBody>
-      </p:sp>
-      <p:sp>
-        <p:nvSpPr>
-          <p:cNvPr id="10" name="Rectangle 9"/>
-          <p:cNvSpPr/>
-          <p:nvPr/>
-        </p:nvSpPr>
-        <p:spPr>
-          <a:xfrm>
-            <a:off x="7269480" y="1965960"/>
-            <a:ext cx="603504" cy="603504"/>
-          </a:xfrm>
-          <a:prstGeom prst="rect">
-            <a:avLst/>
-          </a:prstGeom>
-          <a:solidFill>
-            <a:srgbClr val="F8CBAD"/>
-          </a:solidFill>
-          <a:ln>
-            <a:solidFill>
-              <a:srgbClr val="646464"/>
-            </a:solidFill>
-          </a:ln>
-        </p:spPr>
-        <p:style>
-          <a:lnRef idx="1">
-            <a:schemeClr val="accent1"/>
-          </a:lnRef>
-          <a:fillRef idx="3">
-            <a:schemeClr val="accent1"/>
-          </a:fillRef>
-          <a:effectRef idx="2">
-            <a:schemeClr val="accent1"/>
-          </a:effectRef>
-          <a:fontRef idx="minor">
-            <a:schemeClr val="lt1"/>
-          </a:fontRef>
-        </p:style>
-        <p:txBody>
-          <a:bodyPr rtlCol="0" anchor="ctr"/>
-          <a:lstStyle/>
-          <a:p>
-            <a:pPr algn="ctr"/>
-            <a:r>
-              <a:t>■</a:t>
-            </a:r>
-          </a:p>
-        </p:txBody>
-      </p:sp>
-      <p:sp>
-        <p:nvSpPr>
-          <p:cNvPr id="11" name="Rectangle 10"/>
-          <p:cNvSpPr/>
-          <p:nvPr/>
-        </p:nvSpPr>
-        <p:spPr>
-          <a:xfrm>
-            <a:off x="7909560" y="1965960"/>
-            <a:ext cx="603504" cy="603504"/>
-          </a:xfrm>
-          <a:prstGeom prst="rect">
-            <a:avLst/>
-          </a:prstGeom>
-          <a:solidFill>
-            <a:srgbClr val="F8CBAD"/>
-          </a:solidFill>
-          <a:ln>
-            <a:solidFill>
-              <a:srgbClr val="646464"/>
-            </a:solidFill>
-          </a:ln>
-        </p:spPr>
-        <p:style>
-          <a:lnRef idx="1">
-            <a:schemeClr val="accent1"/>
-          </a:lnRef>
-          <a:fillRef idx="3">
-            <a:schemeClr val="accent1"/>
-          </a:fillRef>
-          <a:effectRef idx="2">
-            <a:schemeClr val="accent1"/>
-          </a:effectRef>
-          <a:fontRef idx="minor">
-            <a:schemeClr val="lt1"/>
-          </a:fontRef>
-        </p:style>
-        <p:txBody>
-          <a:bodyPr rtlCol="0" anchor="ctr"/>
-          <a:lstStyle/>
-          <a:p>
-            <a:pPr algn="ctr"/>
-            <a:r>
-              <a:t>■</a:t>
-            </a:r>
-          </a:p>
-        </p:txBody>
-      </p:sp>
-      <p:sp>
-        <p:nvSpPr>
-          <p:cNvPr id="12" name="Rectangle 11"/>
-          <p:cNvSpPr/>
-          <p:nvPr/>
-        </p:nvSpPr>
-        <p:spPr>
-          <a:xfrm>
-            <a:off x="8549640" y="1965960"/>
-            <a:ext cx="603504" cy="603504"/>
-          </a:xfrm>
-          <a:prstGeom prst="rect">
-            <a:avLst/>
-          </a:prstGeom>
-          <a:solidFill>
-            <a:srgbClr val="F8CBAD"/>
-          </a:solidFill>
-          <a:ln>
-            <a:solidFill>
-              <a:srgbClr val="646464"/>
-            </a:solidFill>
-          </a:ln>
-        </p:spPr>
-        <p:style>
-          <a:lnRef idx="1">
-            <a:schemeClr val="accent1"/>
-          </a:lnRef>
-          <a:fillRef idx="3">
-            <a:schemeClr val="accent1"/>
-          </a:fillRef>
-          <a:effectRef idx="2">
-            <a:schemeClr val="accent1"/>
-          </a:effectRef>
-          <a:fontRef idx="minor">
-            <a:schemeClr val="lt1"/>
-          </a:fontRef>
-        </p:style>
-        <p:txBody>
-          <a:bodyPr rtlCol="0" anchor="ctr"/>
-          <a:lstStyle/>
-          <a:p>
-            <a:pPr algn="ctr"/>
-            <a:r>
-              <a:t>■</a:t>
-            </a:r>
-          </a:p>
-        </p:txBody>
-      </p:sp>
-      <p:sp>
-        <p:nvSpPr>
-          <p:cNvPr id="13" name="Rectangle 12"/>
-          <p:cNvSpPr/>
-          <p:nvPr/>
-        </p:nvSpPr>
-        <p:spPr>
-          <a:xfrm>
-            <a:off x="6629400" y="2606039"/>
-            <a:ext cx="603504" cy="603504"/>
-          </a:xfrm>
-          <a:prstGeom prst="rect">
-            <a:avLst/>
-          </a:prstGeom>
-          <a:solidFill>
-            <a:srgbClr val="F8CBAD"/>
-          </a:solidFill>
-          <a:ln>
-            <a:solidFill>
-              <a:srgbClr val="646464"/>
-            </a:solidFill>
-          </a:ln>
-        </p:spPr>
-        <p:style>
-          <a:lnRef idx="1">
-            <a:schemeClr val="accent1"/>
-          </a:lnRef>
-          <a:fillRef idx="3">
-            <a:schemeClr val="accent1"/>
-          </a:fillRef>
-          <a:effectRef idx="2">
-            <a:schemeClr val="accent1"/>
-          </a:effectRef>
-          <a:fontRef idx="minor">
-            <a:schemeClr val="lt1"/>
-          </a:fontRef>
-        </p:style>
-        <p:txBody>
-          <a:bodyPr rtlCol="0" anchor="ctr"/>
-          <a:lstStyle/>
-          <a:p>
-            <a:pPr algn="ctr"/>
-            <a:r>
-              <a:t>■</a:t>
-            </a:r>
-          </a:p>
-        </p:txBody>
-      </p:sp>
-      <p:sp>
-        <p:nvSpPr>
-          <p:cNvPr id="14" name="Rectangle 13"/>
-          <p:cNvSpPr/>
-          <p:nvPr/>
-        </p:nvSpPr>
-        <p:spPr>
-          <a:xfrm>
-            <a:off x="7269480" y="2606039"/>
-            <a:ext cx="603504" cy="603504"/>
-          </a:xfrm>
-          <a:prstGeom prst="rect">
-            <a:avLst/>
-          </a:prstGeom>
-          <a:solidFill>
-            <a:srgbClr val="F8CBAD"/>
-          </a:solidFill>
-          <a:ln>
-            <a:solidFill>
-              <a:srgbClr val="646464"/>
-            </a:solidFill>
-          </a:ln>
-        </p:spPr>
-        <p:style>
-          <a:lnRef idx="1">
-            <a:schemeClr val="accent1"/>
-          </a:lnRef>
-          <a:fillRef idx="3">
-            <a:schemeClr val="accent1"/>
-          </a:fillRef>
-          <a:effectRef idx="2">
-            <a:schemeClr val="accent1"/>
-          </a:effectRef>
-          <a:fontRef idx="minor">
-            <a:schemeClr val="lt1"/>
-          </a:fontRef>
-        </p:style>
-        <p:txBody>
-          <a:bodyPr rtlCol="0" anchor="ctr"/>
-          <a:lstStyle/>
-          <a:p>
-            <a:pPr algn="ctr"/>
-            <a:r>
-              <a:t>■</a:t>
-            </a:r>
-          </a:p>
-        </p:txBody>
-      </p:sp>
-      <p:sp>
-        <p:nvSpPr>
-          <p:cNvPr id="15" name="Rectangle 14"/>
-          <p:cNvSpPr/>
-          <p:nvPr/>
-        </p:nvSpPr>
-        <p:spPr>
-          <a:xfrm>
-            <a:off x="7909560" y="2606039"/>
-            <a:ext cx="603504" cy="603504"/>
-          </a:xfrm>
-          <a:prstGeom prst="rect">
-            <a:avLst/>
-          </a:prstGeom>
-          <a:solidFill>
-            <a:srgbClr val="F8CBAD"/>
-          </a:solidFill>
-          <a:ln>
-            <a:solidFill>
-              <a:srgbClr val="646464"/>
-            </a:solidFill>
-          </a:ln>
-        </p:spPr>
-        <p:style>
-          <a:lnRef idx="1">
-            <a:schemeClr val="accent1"/>
-          </a:lnRef>
-          <a:fillRef idx="3">
-            <a:schemeClr val="accent1"/>
-          </a:fillRef>
-          <a:effectRef idx="2">
-            <a:schemeClr val="accent1"/>
-          </a:effectRef>
-          <a:fontRef idx="minor">
-            <a:schemeClr val="lt1"/>
-          </a:fontRef>
-        </p:style>
-        <p:txBody>
-          <a:bodyPr rtlCol="0" anchor="ctr"/>
-          <a:lstStyle/>
-          <a:p>
-            <a:pPr algn="ctr"/>
-            <a:r>
-              <a:t>■</a:t>
-            </a:r>
-          </a:p>
-        </p:txBody>
-      </p:sp>
-      <p:sp>
-        <p:nvSpPr>
-          <p:cNvPr id="16" name="Rectangle 15"/>
-          <p:cNvSpPr/>
-          <p:nvPr/>
-        </p:nvSpPr>
-        <p:spPr>
-          <a:xfrm>
-            <a:off x="8549640" y="2606039"/>
-            <a:ext cx="603504" cy="603504"/>
-          </a:xfrm>
-          <a:prstGeom prst="rect">
-            <a:avLst/>
-          </a:prstGeom>
-          <a:solidFill>
-            <a:srgbClr val="F8CBAD"/>
-          </a:solidFill>
-          <a:ln>
-            <a:solidFill>
-              <a:srgbClr val="646464"/>
-            </a:solidFill>
-          </a:ln>
-        </p:spPr>
-        <p:style>
-          <a:lnRef idx="1">
-            <a:schemeClr val="accent1"/>
-          </a:lnRef>
-          <a:fillRef idx="3">
-            <a:schemeClr val="accent1"/>
-          </a:fillRef>
-          <a:effectRef idx="2">
-            <a:schemeClr val="accent1"/>
-          </a:effectRef>
-          <a:fontRef idx="minor">
-            <a:schemeClr val="lt1"/>
-          </a:fontRef>
-        </p:style>
-        <p:txBody>
-          <a:bodyPr rtlCol="0" anchor="ctr"/>
-          <a:lstStyle/>
-          <a:p>
-            <a:pPr algn="ctr"/>
-            <a:r>
-              <a:t>■</a:t>
-            </a:r>
-          </a:p>
-        </p:txBody>
-      </p:sp>
-      <p:sp>
-        <p:nvSpPr>
-          <p:cNvPr id="17" name="Rectangle 16"/>
-          <p:cNvSpPr/>
-          <p:nvPr/>
-        </p:nvSpPr>
-        <p:spPr>
-          <a:xfrm>
-            <a:off x="6629400" y="3246120"/>
-            <a:ext cx="603504" cy="603504"/>
-          </a:xfrm>
-          <a:prstGeom prst="rect">
-            <a:avLst/>
-          </a:prstGeom>
-          <a:solidFill>
-            <a:srgbClr val="F8CBAD"/>
-          </a:solidFill>
-          <a:ln>
-            <a:solidFill>
-              <a:srgbClr val="646464"/>
-            </a:solidFill>
-          </a:ln>
-        </p:spPr>
-        <p:style>
-          <a:lnRef idx="1">
-            <a:schemeClr val="accent1"/>
-          </a:lnRef>
-          <a:fillRef idx="3">
-            <a:schemeClr val="accent1"/>
-          </a:fillRef>
-          <a:effectRef idx="2">
-            <a:schemeClr val="accent1"/>
-          </a:effectRef>
-          <a:fontRef idx="minor">
-            <a:schemeClr val="lt1"/>
-          </a:fontRef>
-        </p:style>
-        <p:txBody>
-          <a:bodyPr rtlCol="0" anchor="ctr"/>
-          <a:lstStyle/>
-          <a:p>
-            <a:pPr algn="ctr"/>
-            <a:r>
-              <a:t>■</a:t>
-            </a:r>
-          </a:p>
-        </p:txBody>
-      </p:sp>
-      <p:sp>
-        <p:nvSpPr>
-          <p:cNvPr id="18" name="Rectangle 17"/>
-          <p:cNvSpPr/>
-          <p:nvPr/>
-        </p:nvSpPr>
-        <p:spPr>
-          <a:xfrm>
-            <a:off x="7269480" y="3246120"/>
-            <a:ext cx="603504" cy="603504"/>
-          </a:xfrm>
-          <a:prstGeom prst="rect">
-            <a:avLst/>
-          </a:prstGeom>
-          <a:solidFill>
-            <a:srgbClr val="F8CBAD"/>
-          </a:solidFill>
-          <a:ln>
-            <a:solidFill>
-              <a:srgbClr val="646464"/>
-            </a:solidFill>
-          </a:ln>
-        </p:spPr>
-        <p:style>
-          <a:lnRef idx="1">
-            <a:schemeClr val="accent1"/>
-          </a:lnRef>
-          <a:fillRef idx="3">
-            <a:schemeClr val="accent1"/>
-          </a:fillRef>
-          <a:effectRef idx="2">
-            <a:schemeClr val="accent1"/>
-          </a:effectRef>
-          <a:fontRef idx="minor">
-            <a:schemeClr val="lt1"/>
-          </a:fontRef>
-        </p:style>
-        <p:txBody>
-          <a:bodyPr rtlCol="0" anchor="ctr"/>
-          <a:lstStyle/>
-          <a:p>
-            <a:pPr algn="ctr"/>
-            <a:r>
-              <a:t>■</a:t>
-            </a:r>
-          </a:p>
-        </p:txBody>
-      </p:sp>
-      <p:sp>
-        <p:nvSpPr>
-          <p:cNvPr id="19" name="Rectangle 18"/>
-          <p:cNvSpPr/>
-          <p:nvPr/>
-        </p:nvSpPr>
-        <p:spPr>
-          <a:xfrm>
-            <a:off x="7909560" y="3246120"/>
-            <a:ext cx="603504" cy="603504"/>
-          </a:xfrm>
-          <a:prstGeom prst="rect">
-            <a:avLst/>
-          </a:prstGeom>
-          <a:solidFill>
-            <a:srgbClr val="F8CBAD"/>
-          </a:solidFill>
-          <a:ln>
-            <a:solidFill>
-              <a:srgbClr val="646464"/>
-            </a:solidFill>
-          </a:ln>
-        </p:spPr>
-        <p:style>
-          <a:lnRef idx="1">
-            <a:schemeClr val="accent1"/>
-          </a:lnRef>
-          <a:fillRef idx="3">
-            <a:schemeClr val="accent1"/>
-          </a:fillRef>
-          <a:effectRef idx="2">
-            <a:schemeClr val="accent1"/>
-          </a:effectRef>
-          <a:fontRef idx="minor">
-            <a:schemeClr val="lt1"/>
-          </a:fontRef>
-        </p:style>
-        <p:txBody>
-          <a:bodyPr rtlCol="0" anchor="ctr"/>
-          <a:lstStyle/>
-          <a:p>
-            <a:pPr algn="ctr"/>
-            <a:r>
-              <a:t>■</a:t>
-            </a:r>
-          </a:p>
-        </p:txBody>
-      </p:sp>
-      <p:sp>
-        <p:nvSpPr>
-          <p:cNvPr id="20" name="Rectangle 19"/>
-          <p:cNvSpPr/>
-          <p:nvPr/>
-        </p:nvSpPr>
-        <p:spPr>
-          <a:xfrm>
-            <a:off x="8549640" y="3246120"/>
-            <a:ext cx="603504" cy="603504"/>
-          </a:xfrm>
-          <a:prstGeom prst="rect">
-            <a:avLst/>
-          </a:prstGeom>
-          <a:solidFill>
-            <a:srgbClr val="F8CBAD"/>
-          </a:solidFill>
-          <a:ln>
-            <a:solidFill>
-              <a:srgbClr val="646464"/>
-            </a:solidFill>
-          </a:ln>
-        </p:spPr>
-        <p:style>
-          <a:lnRef idx="1">
-            <a:schemeClr val="accent1"/>
-          </a:lnRef>
-          <a:fillRef idx="3">
-            <a:schemeClr val="accent1"/>
-          </a:fillRef>
-          <a:effectRef idx="2">
-            <a:schemeClr val="accent1"/>
-          </a:effectRef>
-          <a:fontRef idx="minor">
-            <a:schemeClr val="lt1"/>
-          </a:fontRef>
-        </p:style>
-        <p:txBody>
-          <a:bodyPr rtlCol="0" anchor="ctr"/>
-          <a:lstStyle/>
-          <a:p>
-            <a:pPr algn="ctr"/>
-            <a:r>
-              <a:t>■</a:t>
-            </a:r>
-          </a:p>
-        </p:txBody>
-      </p:sp>
-      <p:sp>
-        <p:nvSpPr>
-          <p:cNvPr id="21" name="Rounded Rectangle 20"/>
-          <p:cNvSpPr/>
-          <p:nvPr/>
-        </p:nvSpPr>
-        <p:spPr>
-          <a:xfrm>
-            <a:off x="5623560" y="1920240"/>
-            <a:ext cx="731520" cy="731520"/>
-          </a:xfrm>
-          <a:prstGeom prst="roundRect">
-            <a:avLst/>
-          </a:prstGeom>
-          <a:solidFill>
-            <a:srgbClr val="FFE699"/>
-          </a:solidFill>
-          <a:ln>
-            <a:solidFill>
-              <a:srgbClr val="4472C4"/>
-            </a:solidFill>
-          </a:ln>
-        </p:spPr>
-        <p:style>
-          <a:lnRef idx="1">
-            <a:schemeClr val="accent1"/>
-          </a:lnRef>
-          <a:fillRef idx="3">
-            <a:schemeClr val="accent1"/>
-          </a:fillRef>
-          <a:effectRef idx="2">
-            <a:schemeClr val="accent1"/>
-          </a:effectRef>
-          <a:fontRef idx="minor">
-            <a:schemeClr val="lt1"/>
-          </a:fontRef>
-        </p:style>
-        <p:txBody>
-          <a:bodyPr rtlCol="0" anchor="ctr" wrap="square"/>
-          <a:lstStyle/>
-          <a:p>
-            <a:pPr algn="ctr"/>
-            <a:r>
-              <a:rPr sz="1800" b="1">
+              <a:rPr sz="1200" b="1">
                 <a:solidFill>
-                  <a:srgbClr val="1F374E"/>
+                  <a:srgbClr val="202C3C"/>
                 </a:solidFill>
               </a:rPr>
-              <a:t>K</a:t>
-            </a:r>
-          </a:p>
-        </p:txBody>
-      </p:sp>
-      <p:sp>
-        <p:nvSpPr>
-          <p:cNvPr id="22" name="TextBox 21"/>
+              <a:t>Reihenwechsel</a:t>
+            </a:r>
+          </a:p>
+        </p:txBody>
+      </p:sp>
+      <p:sp>
+        <p:nvSpPr>
+          <p:cNvPr id="10" name="TextBox 9"/>
           <p:cNvSpPr txBox="1"/>
           <p:nvPr/>
         </p:nvSpPr>
         <p:spPr>
           <a:xfrm>
-            <a:off x="502920" y="6510528"/>
-            <a:ext cx="11064240" cy="182880"/>
+            <a:off x="365760" y="6510528"/>
+            <a:ext cx="11430000" cy="228600"/>
           </a:xfrm>
           <a:prstGeom prst="rect">
             <a:avLst/>
@@ -9488,7 +8433,7 @@
             <a:r>
               <a:rPr sz="800">
                 <a:solidFill>
-                  <a:srgbClr val="646464"/>
+                  <a:srgbClr val="6E6E6E"/>
                 </a:solidFill>
               </a:rPr>
               <a:t>Grafik: eigene Darstellung</a:t>
@@ -9523,13 +8468,13 @@
         <p:spPr>
           <a:xfrm>
             <a:off x="0" y="0"/>
-            <a:ext cx="12191695" cy="100584"/>
+            <a:ext cx="12191695" cy="109728"/>
           </a:xfrm>
           <a:prstGeom prst="rect">
             <a:avLst/>
           </a:prstGeom>
           <a:solidFill>
-            <a:srgbClr val="4472C4"/>
+            <a:srgbClr val="305396"/>
           </a:solidFill>
           <a:ln>
             <a:noFill/>
@@ -9566,7 +8511,7 @@
         <p:spPr>
           <a:xfrm>
             <a:off x="594360" y="320040"/>
-            <a:ext cx="10972800" cy="502920"/>
+            <a:ext cx="10972800" cy="548640"/>
           </a:xfrm>
           <a:prstGeom prst="rect">
             <a:avLst/>
@@ -9582,10 +8527,10 @@
             <a:r>
               <a:rPr sz="2600" b="1">
                 <a:solidFill>
-                  <a:srgbClr val="1F374E"/>
+                  <a:srgbClr val="202C3C"/>
                 </a:solidFill>
               </a:rPr>
-              <a:t>Eine mögliche Lösung als Struktogramm</a:t>
+              <a:t>Quellen</a:t>
             </a:r>
           </a:p>
         </p:txBody>
@@ -9599,7 +8544,7 @@
         <p:spPr>
           <a:xfrm>
             <a:off x="685800" y="1234440"/>
-            <a:ext cx="5303520" cy="4937760"/>
+            <a:ext cx="5394960" cy="5029200"/>
           </a:xfrm>
           <a:prstGeom prst="rect">
             <a:avLst/>
@@ -9614,310 +8559,60 @@
           <a:p>
             <a:pPr>
               <a:spcAft>
-                <a:spcPts val="800"/>
+                <a:spcPts val="700"/>
               </a:spcAft>
               <a:defRPr sz="1900">
                 <a:solidFill>
-                  <a:srgbClr val="232323"/>
+                  <a:srgbClr val="1E1E1E"/>
                 </a:solidFill>
               </a:defRPr>
             </a:pPr>
             <a:r>
-              <a:t>Das Struktogramm zeigt die Struktur, nicht zwingend den einzigen Lösungsweg.</a:t>
+              <a:t>Robot Karol: https://www.schule.bayern.de/karol</a:t>
             </a:r>
           </a:p>
           <a:p>
             <a:pPr>
               <a:spcAft>
-                <a:spcPts val="800"/>
+                <a:spcPts val="700"/>
               </a:spcAft>
               <a:defRPr sz="1900">
                 <a:solidFill>
-                  <a:srgbClr val="232323"/>
+                  <a:srgbClr val="1E1E1E"/>
                 </a:solidFill>
               </a:defRPr>
             </a:pPr>
             <a:r>
-              <a:t>Markiere äußere und innere Wiederholung sowie den Reihenwechsel.</a:t>
-            </a:r>
-          </a:p>
-        </p:txBody>
-      </p:sp>
-      <p:sp>
-        <p:nvSpPr>
-          <p:cNvPr id="5" name="Rounded Rectangle 4"/>
-          <p:cNvSpPr/>
-          <p:nvPr/>
-        </p:nvSpPr>
-        <p:spPr>
-          <a:xfrm>
-            <a:off x="6217920" y="1188720"/>
-            <a:ext cx="5029200" cy="566928"/>
-          </a:xfrm>
-          <a:prstGeom prst="roundRect">
-            <a:avLst/>
-          </a:prstGeom>
-          <a:solidFill>
-            <a:srgbClr val="DCE6F1"/>
-          </a:solidFill>
-          <a:ln>
-            <a:solidFill>
-              <a:srgbClr val="4472C4"/>
-            </a:solidFill>
-          </a:ln>
-        </p:spPr>
-        <p:style>
-          <a:lnRef idx="1">
-            <a:schemeClr val="accent1"/>
-          </a:lnRef>
-          <a:fillRef idx="3">
-            <a:schemeClr val="accent1"/>
-          </a:fillRef>
-          <a:effectRef idx="2">
-            <a:schemeClr val="accent1"/>
-          </a:effectRef>
-          <a:fontRef idx="minor">
-            <a:schemeClr val="lt1"/>
-          </a:fontRef>
-        </p:style>
-        <p:txBody>
-          <a:bodyPr rtlCol="0" anchor="ctr" wrap="square"/>
-          <a:lstStyle/>
-          <a:p>
-            <a:pPr algn="ctr"/>
-            <a:r>
-              <a:rPr sz="1300" b="1">
+              <a:t>Sächsischer Lehrplan Oberschule Informatik, Klassenstufe 8: https://www.schulportal.sachsen.de/lplandb/lehrplan/514</a:t>
+            </a:r>
+          </a:p>
+          <a:p>
+            <a:pPr>
+              <a:spcAft>
+                <a:spcPts val="700"/>
+              </a:spcAft>
+              <a:defRPr sz="1900">
                 <a:solidFill>
-                  <a:srgbClr val="1F374E"/>
+                  <a:srgbClr val="1E1E1E"/>
                 </a:solidFill>
-              </a:rPr>
-              <a:t>4-mal: Reihen</a:t>
-            </a:r>
-          </a:p>
-        </p:txBody>
-      </p:sp>
-      <p:sp>
-        <p:nvSpPr>
-          <p:cNvPr id="6" name="Rounded Rectangle 5"/>
-          <p:cNvSpPr/>
-          <p:nvPr/>
-        </p:nvSpPr>
-        <p:spPr>
-          <a:xfrm>
-            <a:off x="6537959" y="1828800"/>
-            <a:ext cx="4389120" cy="566928"/>
-          </a:xfrm>
-          <a:prstGeom prst="roundRect">
-            <a:avLst/>
-          </a:prstGeom>
-          <a:solidFill>
-            <a:srgbClr val="F2F6FA"/>
-          </a:solidFill>
-          <a:ln>
-            <a:solidFill>
-              <a:srgbClr val="4472C4"/>
-            </a:solidFill>
-          </a:ln>
-        </p:spPr>
-        <p:style>
-          <a:lnRef idx="1">
-            <a:schemeClr val="accent1"/>
-          </a:lnRef>
-          <a:fillRef idx="3">
-            <a:schemeClr val="accent1"/>
-          </a:fillRef>
-          <a:effectRef idx="2">
-            <a:schemeClr val="accent1"/>
-          </a:effectRef>
-          <a:fontRef idx="minor">
-            <a:schemeClr val="lt1"/>
-          </a:fontRef>
-        </p:style>
-        <p:txBody>
-          <a:bodyPr rtlCol="0" anchor="ctr" wrap="square"/>
-          <a:lstStyle/>
-          <a:p>
-            <a:pPr algn="ctr"/>
-            <a:r>
-              <a:rPr sz="1300" b="1">
-                <a:solidFill>
-                  <a:srgbClr val="1F374E"/>
-                </a:solidFill>
-              </a:rPr>
-              <a:t>4-mal: Felder</a:t>
-            </a:r>
-          </a:p>
-        </p:txBody>
-      </p:sp>
-      <p:sp>
-        <p:nvSpPr>
-          <p:cNvPr id="7" name="Rounded Rectangle 6"/>
-          <p:cNvSpPr/>
-          <p:nvPr/>
-        </p:nvSpPr>
-        <p:spPr>
-          <a:xfrm>
-            <a:off x="6858000" y="2468880"/>
-            <a:ext cx="3749039" cy="566928"/>
-          </a:xfrm>
-          <a:prstGeom prst="roundRect">
-            <a:avLst/>
-          </a:prstGeom>
-          <a:solidFill>
-            <a:srgbClr val="FFE699"/>
-          </a:solidFill>
-          <a:ln>
-            <a:solidFill>
-              <a:srgbClr val="4472C4"/>
-            </a:solidFill>
-          </a:ln>
-        </p:spPr>
-        <p:style>
-          <a:lnRef idx="1">
-            <a:schemeClr val="accent1"/>
-          </a:lnRef>
-          <a:fillRef idx="3">
-            <a:schemeClr val="accent1"/>
-          </a:fillRef>
-          <a:effectRef idx="2">
-            <a:schemeClr val="accent1"/>
-          </a:effectRef>
-          <a:fontRef idx="minor">
-            <a:schemeClr val="lt1"/>
-          </a:fontRef>
-        </p:style>
-        <p:txBody>
-          <a:bodyPr rtlCol="0" anchor="ctr" wrap="square"/>
-          <a:lstStyle/>
-          <a:p>
-            <a:pPr algn="ctr"/>
-            <a:r>
-              <a:rPr sz="1300" b="1">
-                <a:solidFill>
-                  <a:srgbClr val="1F374E"/>
-                </a:solidFill>
-              </a:rPr>
-              <a:t>Ziegel hinlegen</a:t>
-            </a:r>
-          </a:p>
-        </p:txBody>
-      </p:sp>
-      <p:sp>
-        <p:nvSpPr>
-          <p:cNvPr id="8" name="Rounded Rectangle 7"/>
-          <p:cNvSpPr/>
-          <p:nvPr/>
-        </p:nvSpPr>
-        <p:spPr>
-          <a:xfrm>
-            <a:off x="6858000" y="3108960"/>
-            <a:ext cx="3749039" cy="566928"/>
-          </a:xfrm>
-          <a:prstGeom prst="roundRect">
-            <a:avLst/>
-          </a:prstGeom>
-          <a:solidFill>
-            <a:srgbClr val="FFE699"/>
-          </a:solidFill>
-          <a:ln>
-            <a:solidFill>
-              <a:srgbClr val="4472C4"/>
-            </a:solidFill>
-          </a:ln>
-        </p:spPr>
-        <p:style>
-          <a:lnRef idx="1">
-            <a:schemeClr val="accent1"/>
-          </a:lnRef>
-          <a:fillRef idx="3">
-            <a:schemeClr val="accent1"/>
-          </a:fillRef>
-          <a:effectRef idx="2">
-            <a:schemeClr val="accent1"/>
-          </a:effectRef>
-          <a:fontRef idx="minor">
-            <a:schemeClr val="lt1"/>
-          </a:fontRef>
-        </p:style>
-        <p:txBody>
-          <a:bodyPr rtlCol="0" anchor="ctr" wrap="square"/>
-          <a:lstStyle/>
-          <a:p>
-            <a:pPr algn="ctr"/>
-            <a:r>
-              <a:rPr sz="1300" b="1">
-                <a:solidFill>
-                  <a:srgbClr val="1F374E"/>
-                </a:solidFill>
-              </a:rPr>
-              <a:t>ggf. Schritt</a:t>
-            </a:r>
-          </a:p>
-        </p:txBody>
-      </p:sp>
-      <p:sp>
-        <p:nvSpPr>
-          <p:cNvPr id="9" name="Rounded Rectangle 8"/>
-          <p:cNvSpPr/>
-          <p:nvPr/>
-        </p:nvSpPr>
-        <p:spPr>
-          <a:xfrm>
-            <a:off x="6537959" y="3749040"/>
-            <a:ext cx="4389120" cy="566928"/>
-          </a:xfrm>
-          <a:prstGeom prst="roundRect">
-            <a:avLst/>
-          </a:prstGeom>
-          <a:solidFill>
-            <a:srgbClr val="F2F6FA"/>
-          </a:solidFill>
-          <a:ln>
-            <a:solidFill>
-              <a:srgbClr val="4472C4"/>
-            </a:solidFill>
-          </a:ln>
-        </p:spPr>
-        <p:style>
-          <a:lnRef idx="1">
-            <a:schemeClr val="accent1"/>
-          </a:lnRef>
-          <a:fillRef idx="3">
-            <a:schemeClr val="accent1"/>
-          </a:fillRef>
-          <a:effectRef idx="2">
-            <a:schemeClr val="accent1"/>
-          </a:effectRef>
-          <a:fontRef idx="minor">
-            <a:schemeClr val="lt1"/>
-          </a:fontRef>
-        </p:style>
-        <p:txBody>
-          <a:bodyPr rtlCol="0" anchor="ctr" wrap="square"/>
-          <a:lstStyle/>
-          <a:p>
-            <a:pPr algn="ctr"/>
-            <a:r>
-              <a:rPr sz="1300" b="1">
-                <a:solidFill>
-                  <a:srgbClr val="1F374E"/>
-                </a:solidFill>
-              </a:rPr>
-              <a:t>Reihenwechsel</a:t>
-            </a:r>
-          </a:p>
-        </p:txBody>
-      </p:sp>
-      <p:sp>
-        <p:nvSpPr>
-          <p:cNvPr id="10" name="TextBox 9"/>
+              </a:defRPr>
+            </a:pPr>
+            <a:r>
+              <a:t>Zielmuster, Struktogramme und Aufgaben: eigene Darstellung.</a:t>
+            </a:r>
+          </a:p>
+        </p:txBody>
+      </p:sp>
+      <p:sp>
+        <p:nvSpPr>
+          <p:cNvPr id="5" name="TextBox 4"/>
           <p:cNvSpPr txBox="1"/>
           <p:nvPr/>
         </p:nvSpPr>
         <p:spPr>
           <a:xfrm>
-            <a:off x="502920" y="6510528"/>
-            <a:ext cx="11064240" cy="182880"/>
+            <a:off x="365760" y="6510528"/>
+            <a:ext cx="11430000" cy="228600"/>
           </a:xfrm>
           <a:prstGeom prst="rect">
             <a:avLst/>
@@ -9934,1042 +8629,10 @@
             <a:r>
               <a:rPr sz="800">
                 <a:solidFill>
-                  <a:srgbClr val="646464"/>
+                  <a:srgbClr val="6E6E6E"/>
                 </a:solidFill>
               </a:rPr>
-              <a:t>Grafik: eigene Darstellung</a:t>
-            </a:r>
-          </a:p>
-        </p:txBody>
-      </p:sp>
-    </p:spTree>
-  </p:cSld>
-  <p:clrMapOvr>
-    <a:masterClrMapping/>
-  </p:clrMapOvr>
-</p:sld>
-</file>
-
-<file path=ppt/slides/slide9.xml><?xml version="1.0" encoding="utf-8"?>
-<p:sld xmlns:a="http://schemas.openxmlformats.org/drawingml/2006/main" xmlns:p="http://schemas.openxmlformats.org/presentationml/2006/main" xmlns:r="http://schemas.openxmlformats.org/officeDocument/2006/relationships">
-  <p:cSld>
-    <p:spTree>
-      <p:nvGrpSpPr>
-        <p:cNvPr id="1" name=""/>
-        <p:cNvGrpSpPr/>
-        <p:nvPr/>
-      </p:nvGrpSpPr>
-      <p:grpSpPr/>
-      <p:sp>
-        <p:nvSpPr>
-          <p:cNvPr id="2" name="Rectangle 1"/>
-          <p:cNvSpPr/>
-          <p:nvPr/>
-        </p:nvSpPr>
-        <p:spPr>
-          <a:xfrm>
-            <a:off x="0" y="0"/>
-            <a:ext cx="12191695" cy="100584"/>
-          </a:xfrm>
-          <a:prstGeom prst="rect">
-            <a:avLst/>
-          </a:prstGeom>
-          <a:solidFill>
-            <a:srgbClr val="4472C4"/>
-          </a:solidFill>
-          <a:ln>
-            <a:noFill/>
-          </a:ln>
-        </p:spPr>
-        <p:style>
-          <a:lnRef idx="1">
-            <a:schemeClr val="accent1"/>
-          </a:lnRef>
-          <a:fillRef idx="3">
-            <a:schemeClr val="accent1"/>
-          </a:fillRef>
-          <a:effectRef idx="2">
-            <a:schemeClr val="accent1"/>
-          </a:effectRef>
-          <a:fontRef idx="minor">
-            <a:schemeClr val="lt1"/>
-          </a:fontRef>
-        </p:style>
-        <p:txBody>
-          <a:bodyPr rtlCol="0" anchor="ctr"/>
-          <a:lstStyle/>
-          <a:p>
-            <a:pPr algn="ctr"/>
-          </a:p>
-        </p:txBody>
-      </p:sp>
-      <p:sp>
-        <p:nvSpPr>
-          <p:cNvPr id="3" name="TextBox 2"/>
-          <p:cNvSpPr txBox="1"/>
-          <p:nvPr/>
-        </p:nvSpPr>
-        <p:spPr>
-          <a:xfrm>
-            <a:off x="594360" y="320040"/>
-            <a:ext cx="10972800" cy="502920"/>
-          </a:xfrm>
-          <a:prstGeom prst="rect">
-            <a:avLst/>
-          </a:prstGeom>
-          <a:noFill/>
-        </p:spPr>
-        <p:txBody>
-          <a:bodyPr wrap="none">
-            <a:spAutoFit/>
-          </a:bodyPr>
-          <a:lstStyle/>
-          <a:p>
-            <a:r>
-              <a:rPr sz="2600" b="1">
-                <a:solidFill>
-                  <a:srgbClr val="1F374E"/>
-                </a:solidFill>
-              </a:rPr>
-              <a:t>Transfer</a:t>
-            </a:r>
-          </a:p>
-        </p:txBody>
-      </p:sp>
-      <p:sp>
-        <p:nvSpPr>
-          <p:cNvPr id="4" name="TextBox 3"/>
-          <p:cNvSpPr txBox="1"/>
-          <p:nvPr/>
-        </p:nvSpPr>
-        <p:spPr>
-          <a:xfrm>
-            <a:off x="685800" y="1234440"/>
-            <a:ext cx="5303520" cy="4937760"/>
-          </a:xfrm>
-          <a:prstGeom prst="rect">
-            <a:avLst/>
-          </a:prstGeom>
-          <a:noFill/>
-        </p:spPr>
-        <p:txBody>
-          <a:bodyPr wrap="square">
-            <a:spAutoFit/>
-          </a:bodyPr>
-          <a:lstStyle/>
-          <a:p>
-            <a:pPr>
-              <a:spcAft>
-                <a:spcPts val="800"/>
-              </a:spcAft>
-              <a:defRPr sz="1900">
-                <a:solidFill>
-                  <a:srgbClr val="232323"/>
-                </a:solidFill>
-              </a:defRPr>
-            </a:pPr>
-            <a:r>
-              <a:t>Wie erzeugst du ein 3 × 6-Feld?</a:t>
-            </a:r>
-          </a:p>
-          <a:p>
-            <a:pPr>
-              <a:spcAft>
-                <a:spcPts val="800"/>
-              </a:spcAft>
-              <a:defRPr sz="1900">
-                <a:solidFill>
-                  <a:srgbClr val="232323"/>
-                </a:solidFill>
-              </a:defRPr>
-            </a:pPr>
-            <a:r>
-              <a:t>Welche Wiederholungszahlen ändern sich?</a:t>
-            </a:r>
-          </a:p>
-          <a:p>
-            <a:pPr>
-              <a:spcAft>
-                <a:spcPts val="800"/>
-              </a:spcAft>
-              <a:defRPr sz="1900">
-                <a:solidFill>
-                  <a:srgbClr val="232323"/>
-                </a:solidFill>
-              </a:defRPr>
-            </a:pPr>
-            <a:r>
-              <a:t>Welche eigene Anweisung kann unverändert bleiben?</a:t>
-            </a:r>
-          </a:p>
-          <a:p>
-            <a:pPr>
-              <a:spcAft>
-                <a:spcPts val="800"/>
-              </a:spcAft>
-              <a:defRPr sz="1900">
-                <a:solidFill>
-                  <a:srgbClr val="232323"/>
-                </a:solidFill>
-              </a:defRPr>
-            </a:pPr>
-            <a:r>
-              <a:t>Wie würdest du ein Rahmenmuster statt einer gefüllten Fläche erzeugen?</a:t>
-            </a:r>
-          </a:p>
-        </p:txBody>
-      </p:sp>
-      <p:sp>
-        <p:nvSpPr>
-          <p:cNvPr id="5" name="Rectangle 4"/>
-          <p:cNvSpPr/>
-          <p:nvPr/>
-        </p:nvSpPr>
-        <p:spPr>
-          <a:xfrm>
-            <a:off x="6629400" y="1325880"/>
-            <a:ext cx="603504" cy="603504"/>
-          </a:xfrm>
-          <a:prstGeom prst="rect">
-            <a:avLst/>
-          </a:prstGeom>
-          <a:solidFill>
-            <a:srgbClr val="F8CBAD"/>
-          </a:solidFill>
-          <a:ln>
-            <a:solidFill>
-              <a:srgbClr val="646464"/>
-            </a:solidFill>
-          </a:ln>
-        </p:spPr>
-        <p:style>
-          <a:lnRef idx="1">
-            <a:schemeClr val="accent1"/>
-          </a:lnRef>
-          <a:fillRef idx="3">
-            <a:schemeClr val="accent1"/>
-          </a:fillRef>
-          <a:effectRef idx="2">
-            <a:schemeClr val="accent1"/>
-          </a:effectRef>
-          <a:fontRef idx="minor">
-            <a:schemeClr val="lt1"/>
-          </a:fontRef>
-        </p:style>
-        <p:txBody>
-          <a:bodyPr rtlCol="0" anchor="ctr"/>
-          <a:lstStyle/>
-          <a:p>
-            <a:pPr algn="ctr"/>
-            <a:r>
-              <a:t>■</a:t>
-            </a:r>
-          </a:p>
-        </p:txBody>
-      </p:sp>
-      <p:sp>
-        <p:nvSpPr>
-          <p:cNvPr id="6" name="Rectangle 5"/>
-          <p:cNvSpPr/>
-          <p:nvPr/>
-        </p:nvSpPr>
-        <p:spPr>
-          <a:xfrm>
-            <a:off x="7269480" y="1325880"/>
-            <a:ext cx="603504" cy="603504"/>
-          </a:xfrm>
-          <a:prstGeom prst="rect">
-            <a:avLst/>
-          </a:prstGeom>
-          <a:solidFill>
-            <a:srgbClr val="F8CBAD"/>
-          </a:solidFill>
-          <a:ln>
-            <a:solidFill>
-              <a:srgbClr val="646464"/>
-            </a:solidFill>
-          </a:ln>
-        </p:spPr>
-        <p:style>
-          <a:lnRef idx="1">
-            <a:schemeClr val="accent1"/>
-          </a:lnRef>
-          <a:fillRef idx="3">
-            <a:schemeClr val="accent1"/>
-          </a:fillRef>
-          <a:effectRef idx="2">
-            <a:schemeClr val="accent1"/>
-          </a:effectRef>
-          <a:fontRef idx="minor">
-            <a:schemeClr val="lt1"/>
-          </a:fontRef>
-        </p:style>
-        <p:txBody>
-          <a:bodyPr rtlCol="0" anchor="ctr"/>
-          <a:lstStyle/>
-          <a:p>
-            <a:pPr algn="ctr"/>
-            <a:r>
-              <a:t>■</a:t>
-            </a:r>
-          </a:p>
-        </p:txBody>
-      </p:sp>
-      <p:sp>
-        <p:nvSpPr>
-          <p:cNvPr id="7" name="Rectangle 6"/>
-          <p:cNvSpPr/>
-          <p:nvPr/>
-        </p:nvSpPr>
-        <p:spPr>
-          <a:xfrm>
-            <a:off x="7909560" y="1325880"/>
-            <a:ext cx="603504" cy="603504"/>
-          </a:xfrm>
-          <a:prstGeom prst="rect">
-            <a:avLst/>
-          </a:prstGeom>
-          <a:solidFill>
-            <a:srgbClr val="F8CBAD"/>
-          </a:solidFill>
-          <a:ln>
-            <a:solidFill>
-              <a:srgbClr val="646464"/>
-            </a:solidFill>
-          </a:ln>
-        </p:spPr>
-        <p:style>
-          <a:lnRef idx="1">
-            <a:schemeClr val="accent1"/>
-          </a:lnRef>
-          <a:fillRef idx="3">
-            <a:schemeClr val="accent1"/>
-          </a:fillRef>
-          <a:effectRef idx="2">
-            <a:schemeClr val="accent1"/>
-          </a:effectRef>
-          <a:fontRef idx="minor">
-            <a:schemeClr val="lt1"/>
-          </a:fontRef>
-        </p:style>
-        <p:txBody>
-          <a:bodyPr rtlCol="0" anchor="ctr"/>
-          <a:lstStyle/>
-          <a:p>
-            <a:pPr algn="ctr"/>
-            <a:r>
-              <a:t>■</a:t>
-            </a:r>
-          </a:p>
-        </p:txBody>
-      </p:sp>
-      <p:sp>
-        <p:nvSpPr>
-          <p:cNvPr id="8" name="Rectangle 7"/>
-          <p:cNvSpPr/>
-          <p:nvPr/>
-        </p:nvSpPr>
-        <p:spPr>
-          <a:xfrm>
-            <a:off x="8549640" y="1325880"/>
-            <a:ext cx="603504" cy="603504"/>
-          </a:xfrm>
-          <a:prstGeom prst="rect">
-            <a:avLst/>
-          </a:prstGeom>
-          <a:solidFill>
-            <a:srgbClr val="F8CBAD"/>
-          </a:solidFill>
-          <a:ln>
-            <a:solidFill>
-              <a:srgbClr val="646464"/>
-            </a:solidFill>
-          </a:ln>
-        </p:spPr>
-        <p:style>
-          <a:lnRef idx="1">
-            <a:schemeClr val="accent1"/>
-          </a:lnRef>
-          <a:fillRef idx="3">
-            <a:schemeClr val="accent1"/>
-          </a:fillRef>
-          <a:effectRef idx="2">
-            <a:schemeClr val="accent1"/>
-          </a:effectRef>
-          <a:fontRef idx="minor">
-            <a:schemeClr val="lt1"/>
-          </a:fontRef>
-        </p:style>
-        <p:txBody>
-          <a:bodyPr rtlCol="0" anchor="ctr"/>
-          <a:lstStyle/>
-          <a:p>
-            <a:pPr algn="ctr"/>
-            <a:r>
-              <a:t>■</a:t>
-            </a:r>
-          </a:p>
-        </p:txBody>
-      </p:sp>
-      <p:sp>
-        <p:nvSpPr>
-          <p:cNvPr id="9" name="Rectangle 8"/>
-          <p:cNvSpPr/>
-          <p:nvPr/>
-        </p:nvSpPr>
-        <p:spPr>
-          <a:xfrm>
-            <a:off x="6629400" y="1965960"/>
-            <a:ext cx="603504" cy="603504"/>
-          </a:xfrm>
-          <a:prstGeom prst="rect">
-            <a:avLst/>
-          </a:prstGeom>
-          <a:solidFill>
-            <a:srgbClr val="F8CBAD"/>
-          </a:solidFill>
-          <a:ln>
-            <a:solidFill>
-              <a:srgbClr val="646464"/>
-            </a:solidFill>
-          </a:ln>
-        </p:spPr>
-        <p:style>
-          <a:lnRef idx="1">
-            <a:schemeClr val="accent1"/>
-          </a:lnRef>
-          <a:fillRef idx="3">
-            <a:schemeClr val="accent1"/>
-          </a:fillRef>
-          <a:effectRef idx="2">
-            <a:schemeClr val="accent1"/>
-          </a:effectRef>
-          <a:fontRef idx="minor">
-            <a:schemeClr val="lt1"/>
-          </a:fontRef>
-        </p:style>
-        <p:txBody>
-          <a:bodyPr rtlCol="0" anchor="ctr"/>
-          <a:lstStyle/>
-          <a:p>
-            <a:pPr algn="ctr"/>
-            <a:r>
-              <a:t>■</a:t>
-            </a:r>
-          </a:p>
-        </p:txBody>
-      </p:sp>
-      <p:sp>
-        <p:nvSpPr>
-          <p:cNvPr id="10" name="Rectangle 9"/>
-          <p:cNvSpPr/>
-          <p:nvPr/>
-        </p:nvSpPr>
-        <p:spPr>
-          <a:xfrm>
-            <a:off x="7269480" y="1965960"/>
-            <a:ext cx="603504" cy="603504"/>
-          </a:xfrm>
-          <a:prstGeom prst="rect">
-            <a:avLst/>
-          </a:prstGeom>
-          <a:solidFill>
-            <a:srgbClr val="F8CBAD"/>
-          </a:solidFill>
-          <a:ln>
-            <a:solidFill>
-              <a:srgbClr val="646464"/>
-            </a:solidFill>
-          </a:ln>
-        </p:spPr>
-        <p:style>
-          <a:lnRef idx="1">
-            <a:schemeClr val="accent1"/>
-          </a:lnRef>
-          <a:fillRef idx="3">
-            <a:schemeClr val="accent1"/>
-          </a:fillRef>
-          <a:effectRef idx="2">
-            <a:schemeClr val="accent1"/>
-          </a:effectRef>
-          <a:fontRef idx="minor">
-            <a:schemeClr val="lt1"/>
-          </a:fontRef>
-        </p:style>
-        <p:txBody>
-          <a:bodyPr rtlCol="0" anchor="ctr"/>
-          <a:lstStyle/>
-          <a:p>
-            <a:pPr algn="ctr"/>
-            <a:r>
-              <a:t>■</a:t>
-            </a:r>
-          </a:p>
-        </p:txBody>
-      </p:sp>
-      <p:sp>
-        <p:nvSpPr>
-          <p:cNvPr id="11" name="Rectangle 10"/>
-          <p:cNvSpPr/>
-          <p:nvPr/>
-        </p:nvSpPr>
-        <p:spPr>
-          <a:xfrm>
-            <a:off x="7909560" y="1965960"/>
-            <a:ext cx="603504" cy="603504"/>
-          </a:xfrm>
-          <a:prstGeom prst="rect">
-            <a:avLst/>
-          </a:prstGeom>
-          <a:solidFill>
-            <a:srgbClr val="F8CBAD"/>
-          </a:solidFill>
-          <a:ln>
-            <a:solidFill>
-              <a:srgbClr val="646464"/>
-            </a:solidFill>
-          </a:ln>
-        </p:spPr>
-        <p:style>
-          <a:lnRef idx="1">
-            <a:schemeClr val="accent1"/>
-          </a:lnRef>
-          <a:fillRef idx="3">
-            <a:schemeClr val="accent1"/>
-          </a:fillRef>
-          <a:effectRef idx="2">
-            <a:schemeClr val="accent1"/>
-          </a:effectRef>
-          <a:fontRef idx="minor">
-            <a:schemeClr val="lt1"/>
-          </a:fontRef>
-        </p:style>
-        <p:txBody>
-          <a:bodyPr rtlCol="0" anchor="ctr"/>
-          <a:lstStyle/>
-          <a:p>
-            <a:pPr algn="ctr"/>
-            <a:r>
-              <a:t>■</a:t>
-            </a:r>
-          </a:p>
-        </p:txBody>
-      </p:sp>
-      <p:sp>
-        <p:nvSpPr>
-          <p:cNvPr id="12" name="Rectangle 11"/>
-          <p:cNvSpPr/>
-          <p:nvPr/>
-        </p:nvSpPr>
-        <p:spPr>
-          <a:xfrm>
-            <a:off x="8549640" y="1965960"/>
-            <a:ext cx="603504" cy="603504"/>
-          </a:xfrm>
-          <a:prstGeom prst="rect">
-            <a:avLst/>
-          </a:prstGeom>
-          <a:solidFill>
-            <a:srgbClr val="F8CBAD"/>
-          </a:solidFill>
-          <a:ln>
-            <a:solidFill>
-              <a:srgbClr val="646464"/>
-            </a:solidFill>
-          </a:ln>
-        </p:spPr>
-        <p:style>
-          <a:lnRef idx="1">
-            <a:schemeClr val="accent1"/>
-          </a:lnRef>
-          <a:fillRef idx="3">
-            <a:schemeClr val="accent1"/>
-          </a:fillRef>
-          <a:effectRef idx="2">
-            <a:schemeClr val="accent1"/>
-          </a:effectRef>
-          <a:fontRef idx="minor">
-            <a:schemeClr val="lt1"/>
-          </a:fontRef>
-        </p:style>
-        <p:txBody>
-          <a:bodyPr rtlCol="0" anchor="ctr"/>
-          <a:lstStyle/>
-          <a:p>
-            <a:pPr algn="ctr"/>
-            <a:r>
-              <a:t>■</a:t>
-            </a:r>
-          </a:p>
-        </p:txBody>
-      </p:sp>
-      <p:sp>
-        <p:nvSpPr>
-          <p:cNvPr id="13" name="Rectangle 12"/>
-          <p:cNvSpPr/>
-          <p:nvPr/>
-        </p:nvSpPr>
-        <p:spPr>
-          <a:xfrm>
-            <a:off x="6629400" y="2606039"/>
-            <a:ext cx="603504" cy="603504"/>
-          </a:xfrm>
-          <a:prstGeom prst="rect">
-            <a:avLst/>
-          </a:prstGeom>
-          <a:solidFill>
-            <a:srgbClr val="F8CBAD"/>
-          </a:solidFill>
-          <a:ln>
-            <a:solidFill>
-              <a:srgbClr val="646464"/>
-            </a:solidFill>
-          </a:ln>
-        </p:spPr>
-        <p:style>
-          <a:lnRef idx="1">
-            <a:schemeClr val="accent1"/>
-          </a:lnRef>
-          <a:fillRef idx="3">
-            <a:schemeClr val="accent1"/>
-          </a:fillRef>
-          <a:effectRef idx="2">
-            <a:schemeClr val="accent1"/>
-          </a:effectRef>
-          <a:fontRef idx="minor">
-            <a:schemeClr val="lt1"/>
-          </a:fontRef>
-        </p:style>
-        <p:txBody>
-          <a:bodyPr rtlCol="0" anchor="ctr"/>
-          <a:lstStyle/>
-          <a:p>
-            <a:pPr algn="ctr"/>
-            <a:r>
-              <a:t>■</a:t>
-            </a:r>
-          </a:p>
-        </p:txBody>
-      </p:sp>
-      <p:sp>
-        <p:nvSpPr>
-          <p:cNvPr id="14" name="Rectangle 13"/>
-          <p:cNvSpPr/>
-          <p:nvPr/>
-        </p:nvSpPr>
-        <p:spPr>
-          <a:xfrm>
-            <a:off x="7269480" y="2606039"/>
-            <a:ext cx="603504" cy="603504"/>
-          </a:xfrm>
-          <a:prstGeom prst="rect">
-            <a:avLst/>
-          </a:prstGeom>
-          <a:solidFill>
-            <a:srgbClr val="F8CBAD"/>
-          </a:solidFill>
-          <a:ln>
-            <a:solidFill>
-              <a:srgbClr val="646464"/>
-            </a:solidFill>
-          </a:ln>
-        </p:spPr>
-        <p:style>
-          <a:lnRef idx="1">
-            <a:schemeClr val="accent1"/>
-          </a:lnRef>
-          <a:fillRef idx="3">
-            <a:schemeClr val="accent1"/>
-          </a:fillRef>
-          <a:effectRef idx="2">
-            <a:schemeClr val="accent1"/>
-          </a:effectRef>
-          <a:fontRef idx="minor">
-            <a:schemeClr val="lt1"/>
-          </a:fontRef>
-        </p:style>
-        <p:txBody>
-          <a:bodyPr rtlCol="0" anchor="ctr"/>
-          <a:lstStyle/>
-          <a:p>
-            <a:pPr algn="ctr"/>
-            <a:r>
-              <a:t>■</a:t>
-            </a:r>
-          </a:p>
-        </p:txBody>
-      </p:sp>
-      <p:sp>
-        <p:nvSpPr>
-          <p:cNvPr id="15" name="Rectangle 14"/>
-          <p:cNvSpPr/>
-          <p:nvPr/>
-        </p:nvSpPr>
-        <p:spPr>
-          <a:xfrm>
-            <a:off x="7909560" y="2606039"/>
-            <a:ext cx="603504" cy="603504"/>
-          </a:xfrm>
-          <a:prstGeom prst="rect">
-            <a:avLst/>
-          </a:prstGeom>
-          <a:solidFill>
-            <a:srgbClr val="F8CBAD"/>
-          </a:solidFill>
-          <a:ln>
-            <a:solidFill>
-              <a:srgbClr val="646464"/>
-            </a:solidFill>
-          </a:ln>
-        </p:spPr>
-        <p:style>
-          <a:lnRef idx="1">
-            <a:schemeClr val="accent1"/>
-          </a:lnRef>
-          <a:fillRef idx="3">
-            <a:schemeClr val="accent1"/>
-          </a:fillRef>
-          <a:effectRef idx="2">
-            <a:schemeClr val="accent1"/>
-          </a:effectRef>
-          <a:fontRef idx="minor">
-            <a:schemeClr val="lt1"/>
-          </a:fontRef>
-        </p:style>
-        <p:txBody>
-          <a:bodyPr rtlCol="0" anchor="ctr"/>
-          <a:lstStyle/>
-          <a:p>
-            <a:pPr algn="ctr"/>
-            <a:r>
-              <a:t>■</a:t>
-            </a:r>
-          </a:p>
-        </p:txBody>
-      </p:sp>
-      <p:sp>
-        <p:nvSpPr>
-          <p:cNvPr id="16" name="Rectangle 15"/>
-          <p:cNvSpPr/>
-          <p:nvPr/>
-        </p:nvSpPr>
-        <p:spPr>
-          <a:xfrm>
-            <a:off x="8549640" y="2606039"/>
-            <a:ext cx="603504" cy="603504"/>
-          </a:xfrm>
-          <a:prstGeom prst="rect">
-            <a:avLst/>
-          </a:prstGeom>
-          <a:solidFill>
-            <a:srgbClr val="F8CBAD"/>
-          </a:solidFill>
-          <a:ln>
-            <a:solidFill>
-              <a:srgbClr val="646464"/>
-            </a:solidFill>
-          </a:ln>
-        </p:spPr>
-        <p:style>
-          <a:lnRef idx="1">
-            <a:schemeClr val="accent1"/>
-          </a:lnRef>
-          <a:fillRef idx="3">
-            <a:schemeClr val="accent1"/>
-          </a:fillRef>
-          <a:effectRef idx="2">
-            <a:schemeClr val="accent1"/>
-          </a:effectRef>
-          <a:fontRef idx="minor">
-            <a:schemeClr val="lt1"/>
-          </a:fontRef>
-        </p:style>
-        <p:txBody>
-          <a:bodyPr rtlCol="0" anchor="ctr"/>
-          <a:lstStyle/>
-          <a:p>
-            <a:pPr algn="ctr"/>
-            <a:r>
-              <a:t>■</a:t>
-            </a:r>
-          </a:p>
-        </p:txBody>
-      </p:sp>
-      <p:sp>
-        <p:nvSpPr>
-          <p:cNvPr id="17" name="Rectangle 16"/>
-          <p:cNvSpPr/>
-          <p:nvPr/>
-        </p:nvSpPr>
-        <p:spPr>
-          <a:xfrm>
-            <a:off x="6629400" y="3246120"/>
-            <a:ext cx="603504" cy="603504"/>
-          </a:xfrm>
-          <a:prstGeom prst="rect">
-            <a:avLst/>
-          </a:prstGeom>
-          <a:solidFill>
-            <a:srgbClr val="F8CBAD"/>
-          </a:solidFill>
-          <a:ln>
-            <a:solidFill>
-              <a:srgbClr val="646464"/>
-            </a:solidFill>
-          </a:ln>
-        </p:spPr>
-        <p:style>
-          <a:lnRef idx="1">
-            <a:schemeClr val="accent1"/>
-          </a:lnRef>
-          <a:fillRef idx="3">
-            <a:schemeClr val="accent1"/>
-          </a:fillRef>
-          <a:effectRef idx="2">
-            <a:schemeClr val="accent1"/>
-          </a:effectRef>
-          <a:fontRef idx="minor">
-            <a:schemeClr val="lt1"/>
-          </a:fontRef>
-        </p:style>
-        <p:txBody>
-          <a:bodyPr rtlCol="0" anchor="ctr"/>
-          <a:lstStyle/>
-          <a:p>
-            <a:pPr algn="ctr"/>
-            <a:r>
-              <a:t>■</a:t>
-            </a:r>
-          </a:p>
-        </p:txBody>
-      </p:sp>
-      <p:sp>
-        <p:nvSpPr>
-          <p:cNvPr id="18" name="Rectangle 17"/>
-          <p:cNvSpPr/>
-          <p:nvPr/>
-        </p:nvSpPr>
-        <p:spPr>
-          <a:xfrm>
-            <a:off x="7269480" y="3246120"/>
-            <a:ext cx="603504" cy="603504"/>
-          </a:xfrm>
-          <a:prstGeom prst="rect">
-            <a:avLst/>
-          </a:prstGeom>
-          <a:solidFill>
-            <a:srgbClr val="F8CBAD"/>
-          </a:solidFill>
-          <a:ln>
-            <a:solidFill>
-              <a:srgbClr val="646464"/>
-            </a:solidFill>
-          </a:ln>
-        </p:spPr>
-        <p:style>
-          <a:lnRef idx="1">
-            <a:schemeClr val="accent1"/>
-          </a:lnRef>
-          <a:fillRef idx="3">
-            <a:schemeClr val="accent1"/>
-          </a:fillRef>
-          <a:effectRef idx="2">
-            <a:schemeClr val="accent1"/>
-          </a:effectRef>
-          <a:fontRef idx="minor">
-            <a:schemeClr val="lt1"/>
-          </a:fontRef>
-        </p:style>
-        <p:txBody>
-          <a:bodyPr rtlCol="0" anchor="ctr"/>
-          <a:lstStyle/>
-          <a:p>
-            <a:pPr algn="ctr"/>
-            <a:r>
-              <a:t>■</a:t>
-            </a:r>
-          </a:p>
-        </p:txBody>
-      </p:sp>
-      <p:sp>
-        <p:nvSpPr>
-          <p:cNvPr id="19" name="Rectangle 18"/>
-          <p:cNvSpPr/>
-          <p:nvPr/>
-        </p:nvSpPr>
-        <p:spPr>
-          <a:xfrm>
-            <a:off x="7909560" y="3246120"/>
-            <a:ext cx="603504" cy="603504"/>
-          </a:xfrm>
-          <a:prstGeom prst="rect">
-            <a:avLst/>
-          </a:prstGeom>
-          <a:solidFill>
-            <a:srgbClr val="F8CBAD"/>
-          </a:solidFill>
-          <a:ln>
-            <a:solidFill>
-              <a:srgbClr val="646464"/>
-            </a:solidFill>
-          </a:ln>
-        </p:spPr>
-        <p:style>
-          <a:lnRef idx="1">
-            <a:schemeClr val="accent1"/>
-          </a:lnRef>
-          <a:fillRef idx="3">
-            <a:schemeClr val="accent1"/>
-          </a:fillRef>
-          <a:effectRef idx="2">
-            <a:schemeClr val="accent1"/>
-          </a:effectRef>
-          <a:fontRef idx="minor">
-            <a:schemeClr val="lt1"/>
-          </a:fontRef>
-        </p:style>
-        <p:txBody>
-          <a:bodyPr rtlCol="0" anchor="ctr"/>
-          <a:lstStyle/>
-          <a:p>
-            <a:pPr algn="ctr"/>
-            <a:r>
-              <a:t>■</a:t>
-            </a:r>
-          </a:p>
-        </p:txBody>
-      </p:sp>
-      <p:sp>
-        <p:nvSpPr>
-          <p:cNvPr id="20" name="Rectangle 19"/>
-          <p:cNvSpPr/>
-          <p:nvPr/>
-        </p:nvSpPr>
-        <p:spPr>
-          <a:xfrm>
-            <a:off x="8549640" y="3246120"/>
-            <a:ext cx="603504" cy="603504"/>
-          </a:xfrm>
-          <a:prstGeom prst="rect">
-            <a:avLst/>
-          </a:prstGeom>
-          <a:solidFill>
-            <a:srgbClr val="F8CBAD"/>
-          </a:solidFill>
-          <a:ln>
-            <a:solidFill>
-              <a:srgbClr val="646464"/>
-            </a:solidFill>
-          </a:ln>
-        </p:spPr>
-        <p:style>
-          <a:lnRef idx="1">
-            <a:schemeClr val="accent1"/>
-          </a:lnRef>
-          <a:fillRef idx="3">
-            <a:schemeClr val="accent1"/>
-          </a:fillRef>
-          <a:effectRef idx="2">
-            <a:schemeClr val="accent1"/>
-          </a:effectRef>
-          <a:fontRef idx="minor">
-            <a:schemeClr val="lt1"/>
-          </a:fontRef>
-        </p:style>
-        <p:txBody>
-          <a:bodyPr rtlCol="0" anchor="ctr"/>
-          <a:lstStyle/>
-          <a:p>
-            <a:pPr algn="ctr"/>
-            <a:r>
-              <a:t>■</a:t>
-            </a:r>
-          </a:p>
-        </p:txBody>
-      </p:sp>
-      <p:sp>
-        <p:nvSpPr>
-          <p:cNvPr id="21" name="Rounded Rectangle 20"/>
-          <p:cNvSpPr/>
-          <p:nvPr/>
-        </p:nvSpPr>
-        <p:spPr>
-          <a:xfrm>
-            <a:off x="5623560" y="1920240"/>
-            <a:ext cx="731520" cy="731520"/>
-          </a:xfrm>
-          <a:prstGeom prst="roundRect">
-            <a:avLst/>
-          </a:prstGeom>
-          <a:solidFill>
-            <a:srgbClr val="FFE699"/>
-          </a:solidFill>
-          <a:ln>
-            <a:solidFill>
-              <a:srgbClr val="4472C4"/>
-            </a:solidFill>
-          </a:ln>
-        </p:spPr>
-        <p:style>
-          <a:lnRef idx="1">
-            <a:schemeClr val="accent1"/>
-          </a:lnRef>
-          <a:fillRef idx="3">
-            <a:schemeClr val="accent1"/>
-          </a:fillRef>
-          <a:effectRef idx="2">
-            <a:schemeClr val="accent1"/>
-          </a:effectRef>
-          <a:fontRef idx="minor">
-            <a:schemeClr val="lt1"/>
-          </a:fontRef>
-        </p:style>
-        <p:txBody>
-          <a:bodyPr rtlCol="0" anchor="ctr" wrap="square"/>
-          <a:lstStyle/>
-          <a:p>
-            <a:pPr algn="ctr"/>
-            <a:r>
-              <a:rPr sz="1800" b="1">
-                <a:solidFill>
-                  <a:srgbClr val="1F374E"/>
-                </a:solidFill>
-              </a:rPr>
-              <a:t>K</a:t>
-            </a:r>
-          </a:p>
-        </p:txBody>
-      </p:sp>
-      <p:sp>
-        <p:nvSpPr>
-          <p:cNvPr id="22" name="TextBox 21"/>
-          <p:cNvSpPr txBox="1"/>
-          <p:nvPr/>
-        </p:nvSpPr>
-        <p:spPr>
-          <a:xfrm>
-            <a:off x="502920" y="6510528"/>
-            <a:ext cx="11064240" cy="182880"/>
-          </a:xfrm>
-          <a:prstGeom prst="rect">
-            <a:avLst/>
-          </a:prstGeom>
-          <a:noFill/>
-        </p:spPr>
-        <p:txBody>
-          <a:bodyPr wrap="none">
-            <a:spAutoFit/>
-          </a:bodyPr>
-          <a:lstStyle/>
-          <a:p>
-            <a:pPr algn="r"/>
-            <a:r>
-              <a:rPr sz="800">
-                <a:solidFill>
-                  <a:srgbClr val="646464"/>
-                </a:solidFill>
-              </a:rPr>
-              <a:t>Grafik: eigene Darstellung</a:t>
+              <a:t>Quellenangaben · Grafiken: eigene Darstellung</a:t>
             </a:r>
           </a:p>
         </p:txBody>
